--- a/documentation/Presentation_CoDeveloppement_HumainIA.pptx
+++ b/documentation/Presentation_CoDeveloppement_HumainIA.pptx
@@ -4,6 +4,9 @@
   <p:sldMasterIdLst>
     <p:sldMasterId id="2147483648" r:id="rId1"/>
   </p:sldMasterIdLst>
+  <p:notesMasterIdLst>
+    <p:notesMasterId r:id="rId9"/>
+  </p:notesMasterIdLst>
   <p:sldIdLst>
     <p:sldId id="256" r:id="rId2"/>
     <p:sldId id="257" r:id="rId3"/>
@@ -13,10 +16,7 @@
     <p:sldId id="261" r:id="rId7"/>
     <p:sldId id="262" r:id="rId8"/>
   </p:sldIdLst>
-  <p:notesMasterIdLst>
-    <p:notesMasterId r:id="rId9"/>
-  </p:notesMasterIdLst>
-  <p:sldSz cx="9144000" cy="5143500"/>
+  <p:sldSz cx="9144000" cy="5143500" type="screen16x9"/>
   <p:notesSz cx="5143500" cy="9144000"/>
   <p:defaultTextStyle>
     <a:lvl1pPr marL="0" algn="l" defTabSz="914400" rtl="0" eaLnBrk="1" latinLnBrk="0" hangingPunct="1">
@@ -110,6 +110,11 @@
       </a:defRPr>
     </a:lvl9pPr>
   </p:defaultTextStyle>
+  <p:extLst>
+    <p:ext uri="{EFAFB233-063F-42B5-8137-9DF3F51BA10A}">
+      <p15:sldGuideLst xmlns:p15="http://schemas.microsoft.com/office/powerpoint/2012/main"/>
+    </p:ext>
+  </p:extLst>
 </p:presentation>
 </file>
 
@@ -135,234 +140,10 @@
           <a:chExt cx="0" cy="0"/>
         </a:xfrm>
       </p:grpSpPr>
-      <p:sp>
-        <p:nvSpPr>
-          <p:cNvPr id="2" name="Header Placeholder 1"/>
-          <p:cNvSpPr>
-            <a:spLocks noGrp="1"/>
-          </p:cNvSpPr>
-          <p:nvPr>
-            <p:ph type="hdr" sz="quarter"/>
-          </p:nvPr>
-        </p:nvSpPr>
-        <p:spPr>
-          <a:xfrm>
-            <a:off x="0" y="0"/>
-            <a:ext cx="2971800" cy="458788"/>
-          </a:xfrm>
-          <a:prstGeom prst="rect">
-            <a:avLst/>
-          </a:prstGeom>
-        </p:spPr>
-        <p:txBody>
-          <a:bodyPr vert="horz" lIns="91440" tIns="45720" rIns="91440" bIns="45720" rtlCol="0"/>
-          <a:lstStyle>
-            <a:lvl1pPr algn="l">
-              <a:defRPr sz="1200"/>
-            </a:lvl1pPr>
-          </a:lstStyle>
-          <a:p>
-            <a:endParaRPr lang="en-US"/>
-          </a:p>
-        </p:txBody>
-      </p:sp>
-      <p:sp>
-        <p:nvSpPr>
-          <p:cNvPr id="3" name="Date Placeholder 2"/>
-          <p:cNvSpPr>
-            <a:spLocks noGrp="1"/>
-          </p:cNvSpPr>
-          <p:nvPr>
-            <p:ph type="dt" idx="1"/>
-          </p:nvPr>
-        </p:nvSpPr>
-        <p:spPr>
-          <a:xfrm>
-            <a:off x="3884613" y="0"/>
-            <a:ext cx="2971800" cy="458788"/>
-          </a:xfrm>
-          <a:prstGeom prst="rect">
-            <a:avLst/>
-          </a:prstGeom>
-        </p:spPr>
-        <p:txBody>
-          <a:bodyPr vert="horz" lIns="91440" tIns="45720" rIns="91440" bIns="45720" rtlCol="0"/>
-          <a:lstStyle>
-            <a:lvl1pPr algn="r">
-              <a:defRPr sz="1200"/>
-            </a:lvl1pPr>
-          </a:lstStyle>
-          <a:p>
-            <a:fld id="{5282F153-3F37-0F45-9E97-73ACFA13230C}" type="datetimeFigureOut">
-              <a:rPr lang="en-US"/>
-              <a:t>7/23/19</a:t>
-            </a:fld>
-            <a:endParaRPr lang="en-US"/>
-          </a:p>
-        </p:txBody>
-      </p:sp>
-      <p:sp>
-        <p:nvSpPr>
-          <p:cNvPr id="4" name="Slide Image Placeholder 3"/>
-          <p:cNvSpPr>
-            <a:spLocks noGrp="1" noRot="1" noChangeAspect="1"/>
-          </p:cNvSpPr>
-          <p:nvPr>
-            <p:ph type="sldImg" idx="2"/>
-          </p:nvPr>
-        </p:nvSpPr>
-        <p:spPr>
-          <a:xfrm>
-            <a:off x="685800" y="1143000"/>
-            <a:ext cx="5486400" cy="3086100"/>
-          </a:xfrm>
-          <a:prstGeom prst="rect">
-            <a:avLst/>
-          </a:prstGeom>
-          <a:noFill/>
-          <a:ln w="12700">
-            <a:solidFill>
-              <a:prstClr val="black"/>
-            </a:solidFill>
-          </a:ln>
-        </p:spPr>
-        <p:txBody>
-          <a:bodyPr vert="horz" lIns="91440" tIns="45720" rIns="91440" bIns="45720" rtlCol="0" anchor="ctr"/>
-          <a:lstStyle/>
-          <a:p>
-            <a:endParaRPr lang="en-US"/>
-          </a:p>
-        </p:txBody>
-      </p:sp>
-      <p:sp>
-        <p:nvSpPr>
-          <p:cNvPr id="5" name="Notes Placeholder 4"/>
-          <p:cNvSpPr>
-            <a:spLocks noGrp="1"/>
-          </p:cNvSpPr>
-          <p:nvPr>
-            <p:ph type="body" sz="quarter" idx="3"/>
-          </p:nvPr>
-        </p:nvSpPr>
-        <p:spPr>
-          <a:xfrm>
-            <a:off x="685800" y="4400550"/>
-            <a:ext cx="5486400" cy="3600450"/>
-          </a:xfrm>
-          <a:prstGeom prst="rect">
-            <a:avLst/>
-          </a:prstGeom>
-        </p:spPr>
-        <p:txBody>
-          <a:bodyPr vert="horz" lIns="91440" tIns="45720" rIns="91440" bIns="45720" rtlCol="0"/>
-          <a:lstStyle/>
-          <a:p>
-            <a:pPr lvl="0"/>
-            <a:r>
-              <a:rPr lang="en-US"/>
-              <a:t>Click to edit Master text styles</a:t>
-            </a:r>
-          </a:p>
-          <a:p>
-            <a:pPr lvl="1"/>
-            <a:r>
-              <a:rPr lang="en-US"/>
-              <a:t>Second level</a:t>
-            </a:r>
-          </a:p>
-          <a:p>
-            <a:pPr lvl="2"/>
-            <a:r>
-              <a:rPr lang="en-US"/>
-              <a:t>Third level</a:t>
-            </a:r>
-          </a:p>
-          <a:p>
-            <a:pPr lvl="3"/>
-            <a:r>
-              <a:rPr lang="en-US"/>
-              <a:t>Fourth level</a:t>
-            </a:r>
-          </a:p>
-          <a:p>
-            <a:pPr lvl="4"/>
-            <a:r>
-              <a:rPr lang="en-US"/>
-              <a:t>Fifth level</a:t>
-            </a:r>
-          </a:p>
-        </p:txBody>
-      </p:sp>
-      <p:sp>
-        <p:nvSpPr>
-          <p:cNvPr id="6" name="Footer Placeholder 5"/>
-          <p:cNvSpPr>
-            <a:spLocks noGrp="1"/>
-          </p:cNvSpPr>
-          <p:nvPr>
-            <p:ph type="ftr" sz="quarter" idx="4"/>
-          </p:nvPr>
-        </p:nvSpPr>
-        <p:spPr>
-          <a:xfrm>
-            <a:off x="0" y="8685213"/>
-            <a:ext cx="2971800" cy="458787"/>
-          </a:xfrm>
-          <a:prstGeom prst="rect">
-            <a:avLst/>
-          </a:prstGeom>
-        </p:spPr>
-        <p:txBody>
-          <a:bodyPr vert="horz" lIns="91440" tIns="45720" rIns="91440" bIns="45720" rtlCol="0" anchor="b"/>
-          <a:lstStyle>
-            <a:lvl1pPr algn="l">
-              <a:defRPr sz="1200"/>
-            </a:lvl1pPr>
-          </a:lstStyle>
-          <a:p>
-            <a:endParaRPr lang="en-US"/>
-          </a:p>
-        </p:txBody>
-      </p:sp>
-      <p:sp>
-        <p:nvSpPr>
-          <p:cNvPr id="7" name="Slide Number Placeholder 6"/>
-          <p:cNvSpPr>
-            <a:spLocks noGrp="1"/>
-          </p:cNvSpPr>
-          <p:nvPr>
-            <p:ph type="sldNum" sz="quarter" idx="5"/>
-          </p:nvPr>
-        </p:nvSpPr>
-        <p:spPr>
-          <a:xfrm>
-            <a:off x="3884613" y="8685213"/>
-            <a:ext cx="2971800" cy="458787"/>
-          </a:xfrm>
-          <a:prstGeom prst="rect">
-            <a:avLst/>
-          </a:prstGeom>
-        </p:spPr>
-        <p:txBody>
-          <a:bodyPr vert="horz" lIns="91440" tIns="45720" rIns="91440" bIns="45720" rtlCol="0" anchor="b"/>
-          <a:lstStyle>
-            <a:lvl1pPr algn="r">
-              <a:defRPr sz="1200"/>
-            </a:lvl1pPr>
-          </a:lstStyle>
-          <a:p>
-            <a:fld id="{CE5E9CC1-C706-0F49-92D6-E571CC5EEA8F}" type="slidenum">
-              <a:rPr lang="en-US"/>
-              <a:t>‹#›</a:t>
-            </a:fld>
-            <a:endParaRPr lang="en-US"/>
-          </a:p>
-        </p:txBody>
-      </p:sp>
     </p:spTree>
     <p:extLst>
       <p:ext uri="{BB962C8B-B14F-4D97-AF65-F5344CB8AC3E}">
-        <p14:creationId xmlns:p14="http://schemas.microsoft.com/office/powerpoint/2010/main" val="1024086991"/>
+        <p14:creationId xmlns:p14="http://schemas.microsoft.com/office/powerpoint/2010/main" val="2604056348"/>
       </p:ext>
     </p:extLst>
   </p:cSld>
@@ -506,10 +287,6 @@
           <a:bodyPr/>
           <a:lstStyle/>
           <a:p>
-            <a:r>
-              <a:rPr lang="en-US" dirty="0"/>
-              <a:t/>
-            </a:r>
             <a:endParaRPr lang="en-US" dirty="0"/>
           </a:p>
         </p:txBody>
@@ -594,10 +371,6 @@
           <a:bodyPr/>
           <a:lstStyle/>
           <a:p>
-            <a:r>
-              <a:rPr lang="en-US" dirty="0"/>
-              <a:t/>
-            </a:r>
             <a:endParaRPr lang="en-US" dirty="0"/>
           </a:p>
         </p:txBody>
@@ -682,10 +455,6 @@
           <a:bodyPr/>
           <a:lstStyle/>
           <a:p>
-            <a:r>
-              <a:rPr lang="en-US" dirty="0"/>
-              <a:t/>
-            </a:r>
             <a:endParaRPr lang="en-US" dirty="0"/>
           </a:p>
         </p:txBody>
@@ -770,10 +539,6 @@
           <a:bodyPr/>
           <a:lstStyle/>
           <a:p>
-            <a:r>
-              <a:rPr lang="en-US" dirty="0"/>
-              <a:t/>
-            </a:r>
             <a:endParaRPr lang="en-US" dirty="0"/>
           </a:p>
         </p:txBody>
@@ -858,10 +623,6 @@
           <a:bodyPr/>
           <a:lstStyle/>
           <a:p>
-            <a:r>
-              <a:rPr lang="en-US" dirty="0"/>
-              <a:t/>
-            </a:r>
             <a:endParaRPr lang="en-US" dirty="0"/>
           </a:p>
         </p:txBody>
@@ -946,10 +707,6 @@
           <a:bodyPr/>
           <a:lstStyle/>
           <a:p>
-            <a:r>
-              <a:rPr lang="en-US" dirty="0"/>
-              <a:t/>
-            </a:r>
             <a:endParaRPr lang="en-US" dirty="0"/>
           </a:p>
         </p:txBody>
@@ -1034,10 +791,6 @@
           <a:bodyPr/>
           <a:lstStyle/>
           <a:p>
-            <a:r>
-              <a:rPr lang="en-US" dirty="0"/>
-              <a:t/>
-            </a:r>
             <a:endParaRPr lang="en-US" dirty="0"/>
           </a:p>
         </p:txBody>
@@ -1111,6 +864,11 @@
 <file path=ppt/slideMasters/slideMaster1.xml><?xml version="1.0" encoding="utf-8"?>
 <p:sldMaster xmlns:a="http://schemas.openxmlformats.org/drawingml/2006/main" xmlns:r="http://schemas.openxmlformats.org/officeDocument/2006/relationships" xmlns:p="http://schemas.openxmlformats.org/presentationml/2006/main">
   <p:cSld>
+    <p:bg>
+      <p:bgRef idx="1001">
+        <a:schemeClr val="bg1"/>
+      </p:bgRef>
+    </p:bg>
     <p:spTree>
       <p:nvGrpSpPr>
         <p:cNvPr id="1" name=""/>
@@ -1393,6 +1151,7 @@
         <a:solidFill>
           <a:srgbClr val="0B2C4A"/>
         </a:solidFill>
+        <a:effectLst/>
       </p:bgPr>
     </p:bg>
     <p:spTree>
@@ -1433,6 +1192,13 @@
             <a:prstDash val="solid"/>
           </a:ln>
         </p:spPr>
+        <p:txBody>
+          <a:bodyPr/>
+          <a:lstStyle/>
+          <a:p>
+            <a:endParaRPr lang="fr-FR"/>
+          </a:p>
+        </p:txBody>
       </p:sp>
       <p:sp>
         <p:nvSpPr>
@@ -1458,6 +1224,13 @@
             <a:prstDash val="solid"/>
           </a:ln>
         </p:spPr>
+        <p:txBody>
+          <a:bodyPr/>
+          <a:lstStyle/>
+          <a:p>
+            <a:endParaRPr lang="fr-FR"/>
+          </a:p>
+        </p:txBody>
       </p:sp>
       <p:sp>
         <p:nvSpPr>
@@ -1483,6 +1256,13 @@
             <a:prstDash val="solid"/>
           </a:ln>
         </p:spPr>
+        <p:txBody>
+          <a:bodyPr/>
+          <a:lstStyle/>
+          <a:p>
+            <a:endParaRPr lang="fr-FR"/>
+          </a:p>
+        </p:txBody>
       </p:sp>
       <p:sp>
         <p:nvSpPr>
@@ -1508,6 +1288,13 @@
             <a:prstDash val="solid"/>
           </a:ln>
         </p:spPr>
+        <p:txBody>
+          <a:bodyPr/>
+          <a:lstStyle/>
+          <a:p>
+            <a:endParaRPr lang="fr-FR"/>
+          </a:p>
+        </p:txBody>
       </p:sp>
       <p:sp>
         <p:nvSpPr>
@@ -1530,7 +1317,7 @@
           <a:bodyPr wrap="square" lIns="0" tIns="0" rIns="0" bIns="0" rtlCol="0" anchor="ctr"/>
           <a:lstStyle/>
           <a:p>
-            <a:pPr algn="ctr" indent="0" marL="0">
+            <a:pPr marL="0" indent="0" algn="ctr">
               <a:buNone/>
             </a:pPr>
             <a:r>
@@ -1566,7 +1353,7 @@
           <a:bodyPr wrap="square" rtlCol="0" anchor="t"/>
           <a:lstStyle/>
           <a:p>
-            <a:pPr indent="0" marL="0">
+            <a:pPr marL="0" indent="0">
               <a:buNone/>
             </a:pPr>
             <a:r>
@@ -1583,7 +1370,7 @@
             <a:endParaRPr lang="en-US" sz="4600" dirty="0"/>
           </a:p>
           <a:p>
-            <a:pPr indent="0" marL="0">
+            <a:pPr marL="0" indent="0">
               <a:buNone/>
             </a:pPr>
             <a:r>
@@ -1622,7 +1409,7 @@
           <a:bodyPr wrap="square" rtlCol="0" anchor="ctr"/>
           <a:lstStyle/>
           <a:p>
-            <a:pPr indent="0" marL="0">
+            <a:pPr marL="0" indent="0">
               <a:buNone/>
             </a:pPr>
             <a:r>
@@ -1664,6 +1451,13 @@
             <a:prstDash val="solid"/>
           </a:ln>
         </p:spPr>
+        <p:txBody>
+          <a:bodyPr/>
+          <a:lstStyle/>
+          <a:p>
+            <a:endParaRPr lang="fr-FR"/>
+          </a:p>
+        </p:txBody>
       </p:sp>
       <p:sp>
         <p:nvSpPr>
@@ -1686,7 +1480,7 @@
           <a:bodyPr wrap="square" lIns="0" tIns="0" rIns="0" bIns="0" rtlCol="0" anchor="ctr"/>
           <a:lstStyle/>
           <a:p>
-            <a:pPr algn="ctr" indent="0" marL="0">
+            <a:pPr marL="0" indent="0" algn="ctr">
               <a:buNone/>
             </a:pPr>
             <a:r>
@@ -1717,6 +1511,7 @@
         <a:solidFill>
           <a:srgbClr val="F0F7FF"/>
         </a:solidFill>
+        <a:effectLst/>
       </p:bgPr>
     </p:bg>
     <p:spTree>
@@ -1757,6 +1552,13 @@
             <a:prstDash val="solid"/>
           </a:ln>
         </p:spPr>
+        <p:txBody>
+          <a:bodyPr/>
+          <a:lstStyle/>
+          <a:p>
+            <a:endParaRPr lang="fr-FR"/>
+          </a:p>
+        </p:txBody>
       </p:sp>
       <p:sp>
         <p:nvSpPr>
@@ -1782,6 +1584,13 @@
             <a:prstDash val="solid"/>
           </a:ln>
         </p:spPr>
+        <p:txBody>
+          <a:bodyPr/>
+          <a:lstStyle/>
+          <a:p>
+            <a:endParaRPr lang="fr-FR"/>
+          </a:p>
+        </p:txBody>
       </p:sp>
       <p:sp>
         <p:nvSpPr>
@@ -1804,7 +1613,7 @@
           <a:bodyPr wrap="square" rtlCol="0" anchor="ctr"/>
           <a:lstStyle/>
           <a:p>
-            <a:pPr indent="0" marL="0">
+            <a:pPr marL="0" indent="0">
               <a:buNone/>
             </a:pPr>
             <a:r>
@@ -1843,7 +1652,7 @@
           <a:bodyPr wrap="square" lIns="0" tIns="0" rIns="0" bIns="0" rtlCol="0" anchor="ctr"/>
           <a:lstStyle/>
           <a:p>
-            <a:pPr algn="r" indent="0" marL="0">
+            <a:pPr marL="0" indent="0" algn="r">
               <a:buNone/>
             </a:pPr>
             <a:r>
@@ -1882,13 +1691,20 @@
             <a:prstDash val="solid"/>
           </a:ln>
           <a:effectLst>
-            <a:outerShdw sx="100000" sy="100000" kx="0" ky="0" algn="bl" rotWithShape="0" blurRad="101600" dist="25400" dir="8100000">
+            <a:outerShdw blurRad="101600" dist="25400" dir="8100000" algn="bl" rotWithShape="0">
               <a:srgbClr val="000000">
                 <a:alpha val="8000"/>
               </a:srgbClr>
             </a:outerShdw>
           </a:effectLst>
         </p:spPr>
+        <p:txBody>
+          <a:bodyPr/>
+          <a:lstStyle/>
+          <a:p>
+            <a:endParaRPr lang="fr-FR"/>
+          </a:p>
+        </p:txBody>
       </p:sp>
       <p:sp>
         <p:nvSpPr>
@@ -1914,6 +1730,13 @@
             <a:prstDash val="solid"/>
           </a:ln>
         </p:spPr>
+        <p:txBody>
+          <a:bodyPr/>
+          <a:lstStyle/>
+          <a:p>
+            <a:endParaRPr lang="fr-FR"/>
+          </a:p>
+        </p:txBody>
       </p:sp>
       <p:sp>
         <p:nvSpPr>
@@ -1936,7 +1759,7 @@
           <a:bodyPr wrap="square" lIns="0" tIns="0" rIns="0" bIns="0" rtlCol="0" anchor="ctr"/>
           <a:lstStyle/>
           <a:p>
-            <a:pPr algn="ctr" indent="0" marL="0">
+            <a:pPr marL="0" indent="0" algn="ctr">
               <a:buNone/>
             </a:pPr>
             <a:r>
@@ -1972,7 +1795,7 @@
           <a:bodyPr wrap="square" rtlCol="0" anchor="t"/>
           <a:lstStyle/>
           <a:p>
-            <a:pPr indent="0" marL="0">
+            <a:pPr marL="0" indent="0">
               <a:buNone/>
             </a:pPr>
             <a:r>
@@ -1989,7 +1812,7 @@
             <a:endParaRPr lang="en-US" sz="1300" dirty="0"/>
           </a:p>
           <a:p>
-            <a:pPr indent="0" marL="0">
+            <a:pPr marL="0" indent="0">
               <a:buNone/>
             </a:pPr>
             <a:r>
@@ -2006,7 +1829,7 @@
             <a:endParaRPr lang="en-US" sz="1300" dirty="0"/>
           </a:p>
           <a:p>
-            <a:pPr indent="0" marL="0">
+            <a:pPr marL="0" indent="0">
               <a:buNone/>
             </a:pPr>
             <a:r>
@@ -2023,7 +1846,7 @@
             <a:endParaRPr lang="en-US" sz="1300" dirty="0"/>
           </a:p>
           <a:p>
-            <a:pPr indent="0" marL="0">
+            <a:pPr marL="0" indent="0">
               <a:buNone/>
             </a:pPr>
             <a:r>
@@ -2040,7 +1863,7 @@
             <a:endParaRPr lang="en-US" sz="1300" dirty="0"/>
           </a:p>
           <a:p>
-            <a:pPr indent="0" marL="0">
+            <a:pPr marL="0" indent="0">
               <a:buNone/>
             </a:pPr>
             <a:r>
@@ -2082,13 +1905,20 @@
             <a:prstDash val="solid"/>
           </a:ln>
           <a:effectLst>
-            <a:outerShdw sx="100000" sy="100000" kx="0" ky="0" algn="bl" rotWithShape="0" blurRad="101600" dist="25400" dir="8100000">
+            <a:outerShdw blurRad="101600" dist="25400" dir="8100000" algn="bl" rotWithShape="0">
               <a:srgbClr val="000000">
                 <a:alpha val="8000"/>
               </a:srgbClr>
             </a:outerShdw>
           </a:effectLst>
         </p:spPr>
+        <p:txBody>
+          <a:bodyPr/>
+          <a:lstStyle/>
+          <a:p>
+            <a:endParaRPr lang="fr-FR"/>
+          </a:p>
+        </p:txBody>
       </p:sp>
       <p:sp>
         <p:nvSpPr>
@@ -2114,6 +1944,13 @@
             <a:prstDash val="solid"/>
           </a:ln>
         </p:spPr>
+        <p:txBody>
+          <a:bodyPr/>
+          <a:lstStyle/>
+          <a:p>
+            <a:endParaRPr lang="fr-FR"/>
+          </a:p>
+        </p:txBody>
       </p:sp>
       <p:sp>
         <p:nvSpPr>
@@ -2136,7 +1973,7 @@
           <a:bodyPr wrap="square" lIns="0" tIns="0" rIns="0" bIns="0" rtlCol="0" anchor="ctr"/>
           <a:lstStyle/>
           <a:p>
-            <a:pPr algn="ctr" indent="0" marL="0">
+            <a:pPr marL="0" indent="0" algn="ctr">
               <a:buNone/>
             </a:pPr>
             <a:r>
@@ -2175,6 +2012,13 @@
             <a:prstDash val="solid"/>
           </a:ln>
         </p:spPr>
+        <p:txBody>
+          <a:bodyPr/>
+          <a:lstStyle/>
+          <a:p>
+            <a:endParaRPr lang="fr-FR"/>
+          </a:p>
+        </p:txBody>
       </p:sp>
       <p:sp>
         <p:nvSpPr>
@@ -2197,7 +2041,7 @@
           <a:bodyPr wrap="square" lIns="0" tIns="0" rIns="0" bIns="0" rtlCol="0" anchor="ctr"/>
           <a:lstStyle/>
           <a:p>
-            <a:pPr algn="ctr" indent="0" marL="0">
+            <a:pPr marL="0" indent="0" algn="ctr">
               <a:buNone/>
             </a:pPr>
             <a:r>
@@ -2233,7 +2077,7 @@
           <a:bodyPr wrap="square" rtlCol="0" anchor="ctr"/>
           <a:lstStyle/>
           <a:p>
-            <a:pPr indent="0" marL="0">
+            <a:pPr marL="0" indent="0">
               <a:buNone/>
             </a:pPr>
             <a:r>
@@ -2275,6 +2119,13 @@
             <a:prstDash val="solid"/>
           </a:ln>
         </p:spPr>
+        <p:txBody>
+          <a:bodyPr/>
+          <a:lstStyle/>
+          <a:p>
+            <a:endParaRPr lang="fr-FR"/>
+          </a:p>
+        </p:txBody>
       </p:sp>
       <p:sp>
         <p:nvSpPr>
@@ -2297,7 +2148,7 @@
           <a:bodyPr wrap="square" lIns="0" tIns="0" rIns="0" bIns="0" rtlCol="0" anchor="ctr"/>
           <a:lstStyle/>
           <a:p>
-            <a:pPr algn="ctr" indent="0" marL="0">
+            <a:pPr marL="0" indent="0" algn="ctr">
               <a:buNone/>
             </a:pPr>
             <a:r>
@@ -2333,7 +2184,7 @@
           <a:bodyPr wrap="square" rtlCol="0" anchor="ctr"/>
           <a:lstStyle/>
           <a:p>
-            <a:pPr indent="0" marL="0">
+            <a:pPr marL="0" indent="0">
               <a:buNone/>
             </a:pPr>
             <a:r>
@@ -2375,6 +2226,13 @@
             <a:prstDash val="solid"/>
           </a:ln>
         </p:spPr>
+        <p:txBody>
+          <a:bodyPr/>
+          <a:lstStyle/>
+          <a:p>
+            <a:endParaRPr lang="fr-FR"/>
+          </a:p>
+        </p:txBody>
       </p:sp>
       <p:sp>
         <p:nvSpPr>
@@ -2397,7 +2255,7 @@
           <a:bodyPr wrap="square" lIns="0" tIns="0" rIns="0" bIns="0" rtlCol="0" anchor="ctr"/>
           <a:lstStyle/>
           <a:p>
-            <a:pPr algn="ctr" indent="0" marL="0">
+            <a:pPr marL="0" indent="0" algn="ctr">
               <a:buNone/>
             </a:pPr>
             <a:r>
@@ -2433,7 +2291,7 @@
           <a:bodyPr wrap="square" rtlCol="0" anchor="ctr"/>
           <a:lstStyle/>
           <a:p>
-            <a:pPr indent="0" marL="0">
+            <a:pPr marL="0" indent="0">
               <a:buNone/>
             </a:pPr>
             <a:r>
@@ -2475,6 +2333,13 @@
             <a:prstDash val="solid"/>
           </a:ln>
         </p:spPr>
+        <p:txBody>
+          <a:bodyPr/>
+          <a:lstStyle/>
+          <a:p>
+            <a:endParaRPr lang="fr-FR"/>
+          </a:p>
+        </p:txBody>
       </p:sp>
       <p:sp>
         <p:nvSpPr>
@@ -2497,7 +2362,7 @@
           <a:bodyPr wrap="square" lIns="0" tIns="0" rIns="0" bIns="0" rtlCol="0" anchor="ctr"/>
           <a:lstStyle/>
           <a:p>
-            <a:pPr algn="ctr" indent="0" marL="0">
+            <a:pPr marL="0" indent="0" algn="ctr">
               <a:buNone/>
             </a:pPr>
             <a:r>
@@ -2533,7 +2398,7 @@
           <a:bodyPr wrap="square" rtlCol="0" anchor="ctr"/>
           <a:lstStyle/>
           <a:p>
-            <a:pPr indent="0" marL="0">
+            <a:pPr marL="0" indent="0">
               <a:buNone/>
             </a:pPr>
             <a:r>
@@ -2575,6 +2440,13 @@
             <a:prstDash val="solid"/>
           </a:ln>
         </p:spPr>
+        <p:txBody>
+          <a:bodyPr/>
+          <a:lstStyle/>
+          <a:p>
+            <a:endParaRPr lang="fr-FR"/>
+          </a:p>
+        </p:txBody>
       </p:sp>
       <p:sp>
         <p:nvSpPr>
@@ -2597,7 +2469,7 @@
           <a:bodyPr wrap="square" lIns="0" tIns="0" rIns="0" bIns="0" rtlCol="0" anchor="ctr"/>
           <a:lstStyle/>
           <a:p>
-            <a:pPr algn="l" indent="0" marL="0">
+            <a:pPr marL="0" indent="0" algn="l">
               <a:buNone/>
             </a:pPr>
             <a:r>
@@ -2628,6 +2500,7 @@
         <a:solidFill>
           <a:srgbClr val="F0F7FF"/>
         </a:solidFill>
+        <a:effectLst/>
       </p:bgPr>
     </p:bg>
     <p:spTree>
@@ -2668,6 +2541,13 @@
             <a:prstDash val="solid"/>
           </a:ln>
         </p:spPr>
+        <p:txBody>
+          <a:bodyPr/>
+          <a:lstStyle/>
+          <a:p>
+            <a:endParaRPr lang="fr-FR"/>
+          </a:p>
+        </p:txBody>
       </p:sp>
       <p:sp>
         <p:nvSpPr>
@@ -2693,6 +2573,13 @@
             <a:prstDash val="solid"/>
           </a:ln>
         </p:spPr>
+        <p:txBody>
+          <a:bodyPr/>
+          <a:lstStyle/>
+          <a:p>
+            <a:endParaRPr lang="fr-FR"/>
+          </a:p>
+        </p:txBody>
       </p:sp>
       <p:sp>
         <p:nvSpPr>
@@ -2715,7 +2602,7 @@
           <a:bodyPr wrap="square" rtlCol="0" anchor="ctr"/>
           <a:lstStyle/>
           <a:p>
-            <a:pPr indent="0" marL="0">
+            <a:pPr marL="0" indent="0">
               <a:buNone/>
             </a:pPr>
             <a:r>
@@ -2754,7 +2641,7 @@
           <a:bodyPr wrap="square" lIns="0" tIns="0" rIns="0" bIns="0" rtlCol="0" anchor="ctr"/>
           <a:lstStyle/>
           <a:p>
-            <a:pPr algn="r" indent="0" marL="0">
+            <a:pPr marL="0" indent="0" algn="r">
               <a:buNone/>
             </a:pPr>
             <a:r>
@@ -2790,7 +2677,7 @@
           <a:bodyPr wrap="square" rtlCol="0" anchor="ctr"/>
           <a:lstStyle/>
           <a:p>
-            <a:pPr indent="0" marL="0">
+            <a:pPr marL="0" indent="0">
               <a:buNone/>
             </a:pPr>
             <a:r>
@@ -2832,13 +2719,20 @@
             <a:prstDash val="solid"/>
           </a:ln>
           <a:effectLst>
-            <a:outerShdw sx="100000" sy="100000" kx="0" ky="0" algn="bl" rotWithShape="0" blurRad="76200" dist="25400" dir="8100000">
+            <a:outerShdw blurRad="76200" dist="25400" dir="8100000" algn="bl" rotWithShape="0">
               <a:srgbClr val="000000">
                 <a:alpha val="10000"/>
               </a:srgbClr>
             </a:outerShdw>
           </a:effectLst>
         </p:spPr>
+        <p:txBody>
+          <a:bodyPr/>
+          <a:lstStyle/>
+          <a:p>
+            <a:endParaRPr lang="fr-FR"/>
+          </a:p>
+        </p:txBody>
       </p:sp>
       <p:sp>
         <p:nvSpPr>
@@ -2864,6 +2758,13 @@
             <a:prstDash val="solid"/>
           </a:ln>
         </p:spPr>
+        <p:txBody>
+          <a:bodyPr/>
+          <a:lstStyle/>
+          <a:p>
+            <a:endParaRPr lang="fr-FR"/>
+          </a:p>
+        </p:txBody>
       </p:sp>
       <p:sp>
         <p:nvSpPr>
@@ -2886,7 +2787,7 @@
           <a:bodyPr wrap="square" lIns="0" tIns="0" rIns="0" bIns="0" rtlCol="0" anchor="ctr"/>
           <a:lstStyle/>
           <a:p>
-            <a:pPr algn="ctr" indent="0" marL="0">
+            <a:pPr marL="0" indent="0" algn="ctr">
               <a:buNone/>
             </a:pPr>
             <a:r>
@@ -2922,7 +2823,7 @@
           <a:bodyPr wrap="square" lIns="0" tIns="0" rIns="0" bIns="0" rtlCol="0" anchor="ctr"/>
           <a:lstStyle/>
           <a:p>
-            <a:pPr algn="l" indent="0" marL="0">
+            <a:pPr marL="0" indent="0" algn="l">
               <a:buNone/>
             </a:pPr>
             <a:r>
@@ -2958,7 +2859,7 @@
           <a:bodyPr wrap="square" rtlCol="0" anchor="t"/>
           <a:lstStyle/>
           <a:p>
-            <a:pPr indent="0" marL="0">
+            <a:pPr marL="0" indent="0">
               <a:buNone/>
             </a:pPr>
             <a:r>
@@ -3000,13 +2901,20 @@
             <a:prstDash val="solid"/>
           </a:ln>
           <a:effectLst>
-            <a:outerShdw sx="100000" sy="100000" kx="0" ky="0" algn="bl" rotWithShape="0" blurRad="76200" dist="25400" dir="8100000">
+            <a:outerShdw blurRad="76200" dist="25400" dir="8100000" algn="bl" rotWithShape="0">
               <a:srgbClr val="000000">
                 <a:alpha val="10000"/>
               </a:srgbClr>
             </a:outerShdw>
           </a:effectLst>
         </p:spPr>
+        <p:txBody>
+          <a:bodyPr/>
+          <a:lstStyle/>
+          <a:p>
+            <a:endParaRPr lang="fr-FR"/>
+          </a:p>
+        </p:txBody>
       </p:sp>
       <p:sp>
         <p:nvSpPr>
@@ -3032,6 +2940,13 @@
             <a:prstDash val="solid"/>
           </a:ln>
         </p:spPr>
+        <p:txBody>
+          <a:bodyPr/>
+          <a:lstStyle/>
+          <a:p>
+            <a:endParaRPr lang="fr-FR"/>
+          </a:p>
+        </p:txBody>
       </p:sp>
       <p:sp>
         <p:nvSpPr>
@@ -3054,7 +2969,7 @@
           <a:bodyPr wrap="square" lIns="0" tIns="0" rIns="0" bIns="0" rtlCol="0" anchor="ctr"/>
           <a:lstStyle/>
           <a:p>
-            <a:pPr algn="ctr" indent="0" marL="0">
+            <a:pPr marL="0" indent="0" algn="ctr">
               <a:buNone/>
             </a:pPr>
             <a:r>
@@ -3090,7 +3005,7 @@
           <a:bodyPr wrap="square" lIns="0" tIns="0" rIns="0" bIns="0" rtlCol="0" anchor="ctr"/>
           <a:lstStyle/>
           <a:p>
-            <a:pPr algn="l" indent="0" marL="0">
+            <a:pPr marL="0" indent="0" algn="l">
               <a:buNone/>
             </a:pPr>
             <a:r>
@@ -3126,7 +3041,7 @@
           <a:bodyPr wrap="square" rtlCol="0" anchor="t"/>
           <a:lstStyle/>
           <a:p>
-            <a:pPr indent="0" marL="0">
+            <a:pPr marL="0" indent="0">
               <a:buNone/>
             </a:pPr>
             <a:r>
@@ -3168,13 +3083,20 @@
             <a:prstDash val="solid"/>
           </a:ln>
           <a:effectLst>
-            <a:outerShdw sx="100000" sy="100000" kx="0" ky="0" algn="bl" rotWithShape="0" blurRad="76200" dist="25400" dir="8100000">
+            <a:outerShdw blurRad="76200" dist="25400" dir="8100000" algn="bl" rotWithShape="0">
               <a:srgbClr val="000000">
                 <a:alpha val="10000"/>
               </a:srgbClr>
             </a:outerShdw>
           </a:effectLst>
         </p:spPr>
+        <p:txBody>
+          <a:bodyPr/>
+          <a:lstStyle/>
+          <a:p>
+            <a:endParaRPr lang="fr-FR"/>
+          </a:p>
+        </p:txBody>
       </p:sp>
       <p:sp>
         <p:nvSpPr>
@@ -3200,6 +3122,13 @@
             <a:prstDash val="solid"/>
           </a:ln>
         </p:spPr>
+        <p:txBody>
+          <a:bodyPr/>
+          <a:lstStyle/>
+          <a:p>
+            <a:endParaRPr lang="fr-FR"/>
+          </a:p>
+        </p:txBody>
       </p:sp>
       <p:sp>
         <p:nvSpPr>
@@ -3222,7 +3151,7 @@
           <a:bodyPr wrap="square" lIns="0" tIns="0" rIns="0" bIns="0" rtlCol="0" anchor="ctr"/>
           <a:lstStyle/>
           <a:p>
-            <a:pPr algn="ctr" indent="0" marL="0">
+            <a:pPr marL="0" indent="0" algn="ctr">
               <a:buNone/>
             </a:pPr>
             <a:r>
@@ -3258,7 +3187,7 @@
           <a:bodyPr wrap="square" lIns="0" tIns="0" rIns="0" bIns="0" rtlCol="0" anchor="ctr"/>
           <a:lstStyle/>
           <a:p>
-            <a:pPr algn="l" indent="0" marL="0">
+            <a:pPr marL="0" indent="0" algn="l">
               <a:buNone/>
             </a:pPr>
             <a:r>
@@ -3294,7 +3223,7 @@
           <a:bodyPr wrap="square" rtlCol="0" anchor="t"/>
           <a:lstStyle/>
           <a:p>
-            <a:pPr indent="0" marL="0">
+            <a:pPr marL="0" indent="0">
               <a:buNone/>
             </a:pPr>
             <a:r>
@@ -3336,13 +3265,20 @@
             <a:prstDash val="solid"/>
           </a:ln>
           <a:effectLst>
-            <a:outerShdw sx="100000" sy="100000" kx="0" ky="0" algn="bl" rotWithShape="0" blurRad="76200" dist="25400" dir="8100000">
+            <a:outerShdw blurRad="76200" dist="25400" dir="8100000" algn="bl" rotWithShape="0">
               <a:srgbClr val="000000">
                 <a:alpha val="10000"/>
               </a:srgbClr>
             </a:outerShdw>
           </a:effectLst>
         </p:spPr>
+        <p:txBody>
+          <a:bodyPr/>
+          <a:lstStyle/>
+          <a:p>
+            <a:endParaRPr lang="fr-FR"/>
+          </a:p>
+        </p:txBody>
       </p:sp>
       <p:sp>
         <p:nvSpPr>
@@ -3368,6 +3304,13 @@
             <a:prstDash val="solid"/>
           </a:ln>
         </p:spPr>
+        <p:txBody>
+          <a:bodyPr/>
+          <a:lstStyle/>
+          <a:p>
+            <a:endParaRPr lang="fr-FR"/>
+          </a:p>
+        </p:txBody>
       </p:sp>
       <p:sp>
         <p:nvSpPr>
@@ -3390,7 +3333,7 @@
           <a:bodyPr wrap="square" lIns="0" tIns="0" rIns="0" bIns="0" rtlCol="0" anchor="ctr"/>
           <a:lstStyle/>
           <a:p>
-            <a:pPr algn="ctr" indent="0" marL="0">
+            <a:pPr marL="0" indent="0" algn="ctr">
               <a:buNone/>
             </a:pPr>
             <a:r>
@@ -3426,7 +3369,7 @@
           <a:bodyPr wrap="square" lIns="0" tIns="0" rIns="0" bIns="0" rtlCol="0" anchor="ctr"/>
           <a:lstStyle/>
           <a:p>
-            <a:pPr algn="l" indent="0" marL="0">
+            <a:pPr marL="0" indent="0" algn="l">
               <a:buNone/>
             </a:pPr>
             <a:r>
@@ -3462,7 +3405,7 @@
           <a:bodyPr wrap="square" rtlCol="0" anchor="t"/>
           <a:lstStyle/>
           <a:p>
-            <a:pPr indent="0" marL="0">
+            <a:pPr marL="0" indent="0">
               <a:buNone/>
             </a:pPr>
             <a:r>
@@ -3504,6 +3447,13 @@
             <a:prstDash val="solid"/>
           </a:ln>
         </p:spPr>
+        <p:txBody>
+          <a:bodyPr/>
+          <a:lstStyle/>
+          <a:p>
+            <a:endParaRPr lang="fr-FR"/>
+          </a:p>
+        </p:txBody>
       </p:sp>
       <p:sp>
         <p:nvSpPr>
@@ -3529,6 +3479,13 @@
             <a:prstDash val="solid"/>
           </a:ln>
         </p:spPr>
+        <p:txBody>
+          <a:bodyPr/>
+          <a:lstStyle/>
+          <a:p>
+            <a:endParaRPr lang="fr-FR"/>
+          </a:p>
+        </p:txBody>
       </p:sp>
       <p:sp>
         <p:nvSpPr>
@@ -3554,6 +3511,13 @@
             <a:prstDash val="solid"/>
           </a:ln>
         </p:spPr>
+        <p:txBody>
+          <a:bodyPr/>
+          <a:lstStyle/>
+          <a:p>
+            <a:endParaRPr lang="fr-FR"/>
+          </a:p>
+        </p:txBody>
       </p:sp>
       <p:sp>
         <p:nvSpPr>
@@ -3579,6 +3543,13 @@
             <a:prstDash val="solid"/>
           </a:ln>
         </p:spPr>
+        <p:txBody>
+          <a:bodyPr/>
+          <a:lstStyle/>
+          <a:p>
+            <a:endParaRPr lang="fr-FR"/>
+          </a:p>
+        </p:txBody>
       </p:sp>
       <p:sp>
         <p:nvSpPr>
@@ -3601,7 +3572,7 @@
           <a:bodyPr wrap="square" lIns="0" tIns="0" rIns="0" bIns="0" rtlCol="0" anchor="ctr"/>
           <a:lstStyle/>
           <a:p>
-            <a:pPr algn="l" indent="0" marL="0">
+            <a:pPr marL="0" indent="0" algn="l">
               <a:buNone/>
             </a:pPr>
             <a:r>
@@ -3632,6 +3603,7 @@
         <a:solidFill>
           <a:srgbClr val="F0F7FF"/>
         </a:solidFill>
+        <a:effectLst/>
       </p:bgPr>
     </p:bg>
     <p:spTree>
@@ -3672,6 +3644,13 @@
             <a:prstDash val="solid"/>
           </a:ln>
         </p:spPr>
+        <p:txBody>
+          <a:bodyPr/>
+          <a:lstStyle/>
+          <a:p>
+            <a:endParaRPr lang="fr-FR"/>
+          </a:p>
+        </p:txBody>
       </p:sp>
       <p:sp>
         <p:nvSpPr>
@@ -3697,6 +3676,13 @@
             <a:prstDash val="solid"/>
           </a:ln>
         </p:spPr>
+        <p:txBody>
+          <a:bodyPr/>
+          <a:lstStyle/>
+          <a:p>
+            <a:endParaRPr lang="fr-FR"/>
+          </a:p>
+        </p:txBody>
       </p:sp>
       <p:sp>
         <p:nvSpPr>
@@ -3719,7 +3705,7 @@
           <a:bodyPr wrap="square" rtlCol="0" anchor="ctr"/>
           <a:lstStyle/>
           <a:p>
-            <a:pPr indent="0" marL="0">
+            <a:pPr marL="0" indent="0">
               <a:buNone/>
             </a:pPr>
             <a:r>
@@ -3758,7 +3744,7 @@
           <a:bodyPr wrap="square" lIns="0" tIns="0" rIns="0" bIns="0" rtlCol="0" anchor="ctr"/>
           <a:lstStyle/>
           <a:p>
-            <a:pPr algn="r" indent="0" marL="0">
+            <a:pPr marL="0" indent="0" algn="r">
               <a:buNone/>
             </a:pPr>
             <a:r>
@@ -3797,13 +3783,20 @@
             <a:prstDash val="solid"/>
           </a:ln>
           <a:effectLst>
-            <a:outerShdw sx="100000" sy="100000" kx="0" ky="0" algn="bl" rotWithShape="0" blurRad="76200" dist="25400" dir="8100000">
+            <a:outerShdw blurRad="76200" dist="25400" dir="8100000" algn="bl" rotWithShape="0">
               <a:srgbClr val="000000">
                 <a:alpha val="8000"/>
               </a:srgbClr>
             </a:outerShdw>
           </a:effectLst>
         </p:spPr>
+        <p:txBody>
+          <a:bodyPr/>
+          <a:lstStyle/>
+          <a:p>
+            <a:endParaRPr lang="fr-FR"/>
+          </a:p>
+        </p:txBody>
       </p:sp>
       <p:sp>
         <p:nvSpPr>
@@ -3829,6 +3822,13 @@
             <a:prstDash val="solid"/>
           </a:ln>
         </p:spPr>
+        <p:txBody>
+          <a:bodyPr/>
+          <a:lstStyle/>
+          <a:p>
+            <a:endParaRPr lang="fr-FR"/>
+          </a:p>
+        </p:txBody>
       </p:sp>
       <p:sp>
         <p:nvSpPr>
@@ -3851,7 +3851,7 @@
           <a:bodyPr wrap="square" lIns="0" tIns="0" rIns="0" bIns="0" rtlCol="0" anchor="ctr"/>
           <a:lstStyle/>
           <a:p>
-            <a:pPr algn="ctr" indent="0" marL="0">
+            <a:pPr marL="0" indent="0" algn="ctr">
               <a:buNone/>
             </a:pPr>
             <a:r>
@@ -3890,6 +3890,13 @@
             <a:prstDash val="solid"/>
           </a:ln>
         </p:spPr>
+        <p:txBody>
+          <a:bodyPr/>
+          <a:lstStyle/>
+          <a:p>
+            <a:endParaRPr lang="fr-FR"/>
+          </a:p>
+        </p:txBody>
       </p:sp>
       <p:sp>
         <p:nvSpPr>
@@ -3912,7 +3919,7 @@
           <a:bodyPr wrap="square" lIns="0" tIns="0" rIns="0" bIns="0" rtlCol="0" anchor="ctr"/>
           <a:lstStyle/>
           <a:p>
-            <a:pPr algn="ctr" indent="0" marL="0">
+            <a:pPr marL="0" indent="0" algn="ctr">
               <a:buNone/>
             </a:pPr>
             <a:r>
@@ -3948,7 +3955,7 @@
           <a:bodyPr wrap="square" rtlCol="0" anchor="ctr"/>
           <a:lstStyle/>
           <a:p>
-            <a:pPr indent="0" marL="0">
+            <a:pPr marL="0" indent="0">
               <a:buNone/>
             </a:pPr>
             <a:r>
@@ -3990,6 +3997,13 @@
             <a:prstDash val="solid"/>
           </a:ln>
         </p:spPr>
+        <p:txBody>
+          <a:bodyPr/>
+          <a:lstStyle/>
+          <a:p>
+            <a:endParaRPr lang="fr-FR"/>
+          </a:p>
+        </p:txBody>
       </p:sp>
       <p:sp>
         <p:nvSpPr>
@@ -4012,7 +4026,7 @@
           <a:bodyPr wrap="square" lIns="0" tIns="0" rIns="0" bIns="0" rtlCol="0" anchor="ctr"/>
           <a:lstStyle/>
           <a:p>
-            <a:pPr algn="ctr" indent="0" marL="0">
+            <a:pPr marL="0" indent="0" algn="ctr">
               <a:buNone/>
             </a:pPr>
             <a:r>
@@ -4048,7 +4062,7 @@
           <a:bodyPr wrap="square" rtlCol="0" anchor="ctr"/>
           <a:lstStyle/>
           <a:p>
-            <a:pPr indent="0" marL="0">
+            <a:pPr marL="0" indent="0">
               <a:buNone/>
             </a:pPr>
             <a:r>
@@ -4090,6 +4104,13 @@
             <a:prstDash val="solid"/>
           </a:ln>
         </p:spPr>
+        <p:txBody>
+          <a:bodyPr/>
+          <a:lstStyle/>
+          <a:p>
+            <a:endParaRPr lang="fr-FR"/>
+          </a:p>
+        </p:txBody>
       </p:sp>
       <p:sp>
         <p:nvSpPr>
@@ -4112,7 +4133,7 @@
           <a:bodyPr wrap="square" lIns="0" tIns="0" rIns="0" bIns="0" rtlCol="0" anchor="ctr"/>
           <a:lstStyle/>
           <a:p>
-            <a:pPr algn="ctr" indent="0" marL="0">
+            <a:pPr marL="0" indent="0" algn="ctr">
               <a:buNone/>
             </a:pPr>
             <a:r>
@@ -4148,7 +4169,7 @@
           <a:bodyPr wrap="square" rtlCol="0" anchor="ctr"/>
           <a:lstStyle/>
           <a:p>
-            <a:pPr indent="0" marL="0">
+            <a:pPr marL="0" indent="0">
               <a:buNone/>
             </a:pPr>
             <a:r>
@@ -4190,6 +4211,13 @@
             <a:prstDash val="solid"/>
           </a:ln>
         </p:spPr>
+        <p:txBody>
+          <a:bodyPr/>
+          <a:lstStyle/>
+          <a:p>
+            <a:endParaRPr lang="fr-FR"/>
+          </a:p>
+        </p:txBody>
       </p:sp>
       <p:sp>
         <p:nvSpPr>
@@ -4212,7 +4240,7 @@
           <a:bodyPr wrap="square" lIns="0" tIns="0" rIns="0" bIns="0" rtlCol="0" anchor="ctr"/>
           <a:lstStyle/>
           <a:p>
-            <a:pPr algn="ctr" indent="0" marL="0">
+            <a:pPr marL="0" indent="0" algn="ctr">
               <a:buNone/>
             </a:pPr>
             <a:r>
@@ -4248,7 +4276,7 @@
           <a:bodyPr wrap="square" rtlCol="0" anchor="ctr"/>
           <a:lstStyle/>
           <a:p>
-            <a:pPr indent="0" marL="0">
+            <a:pPr marL="0" indent="0">
               <a:buNone/>
             </a:pPr>
             <a:r>
@@ -4290,6 +4318,13 @@
             <a:prstDash val="solid"/>
           </a:ln>
         </p:spPr>
+        <p:txBody>
+          <a:bodyPr/>
+          <a:lstStyle/>
+          <a:p>
+            <a:endParaRPr lang="fr-FR"/>
+          </a:p>
+        </p:txBody>
       </p:sp>
       <p:sp>
         <p:nvSpPr>
@@ -4312,7 +4347,7 @@
           <a:bodyPr wrap="square" lIns="0" tIns="0" rIns="0" bIns="0" rtlCol="0" anchor="ctr"/>
           <a:lstStyle/>
           <a:p>
-            <a:pPr algn="ctr" indent="0" marL="0">
+            <a:pPr marL="0" indent="0" algn="ctr">
               <a:buNone/>
             </a:pPr>
             <a:r>
@@ -4348,7 +4383,7 @@
           <a:bodyPr wrap="square" rtlCol="0" anchor="ctr"/>
           <a:lstStyle/>
           <a:p>
-            <a:pPr indent="0" marL="0">
+            <a:pPr marL="0" indent="0">
               <a:buNone/>
             </a:pPr>
             <a:r>
@@ -4390,13 +4425,20 @@
             <a:prstDash val="solid"/>
           </a:ln>
           <a:effectLst>
-            <a:outerShdw sx="100000" sy="100000" kx="0" ky="0" algn="bl" rotWithShape="0" blurRad="76200" dist="25400" dir="8100000">
+            <a:outerShdw blurRad="76200" dist="25400" dir="8100000" algn="bl" rotWithShape="0">
               <a:srgbClr val="000000">
                 <a:alpha val="8000"/>
               </a:srgbClr>
             </a:outerShdw>
           </a:effectLst>
         </p:spPr>
+        <p:txBody>
+          <a:bodyPr/>
+          <a:lstStyle/>
+          <a:p>
+            <a:endParaRPr lang="fr-FR"/>
+          </a:p>
+        </p:txBody>
       </p:sp>
       <p:sp>
         <p:nvSpPr>
@@ -4422,6 +4464,13 @@
             <a:prstDash val="solid"/>
           </a:ln>
         </p:spPr>
+        <p:txBody>
+          <a:bodyPr/>
+          <a:lstStyle/>
+          <a:p>
+            <a:endParaRPr lang="fr-FR"/>
+          </a:p>
+        </p:txBody>
       </p:sp>
       <p:sp>
         <p:nvSpPr>
@@ -4444,7 +4493,7 @@
           <a:bodyPr wrap="square" lIns="0" tIns="0" rIns="0" bIns="0" rtlCol="0" anchor="ctr"/>
           <a:lstStyle/>
           <a:p>
-            <a:pPr algn="ctr" indent="0" marL="0">
+            <a:pPr marL="0" indent="0" algn="ctr">
               <a:buNone/>
             </a:pPr>
             <a:r>
@@ -4483,6 +4532,13 @@
             <a:prstDash val="solid"/>
           </a:ln>
         </p:spPr>
+        <p:txBody>
+          <a:bodyPr/>
+          <a:lstStyle/>
+          <a:p>
+            <a:endParaRPr lang="fr-FR"/>
+          </a:p>
+        </p:txBody>
       </p:sp>
       <p:sp>
         <p:nvSpPr>
@@ -4505,7 +4561,7 @@
           <a:bodyPr wrap="square" rtlCol="0" anchor="ctr"/>
           <a:lstStyle/>
           <a:p>
-            <a:pPr indent="0" marL="0">
+            <a:pPr marL="0" indent="0">
               <a:buNone/>
             </a:pPr>
             <a:r>
@@ -4547,6 +4603,13 @@
             <a:prstDash val="solid"/>
           </a:ln>
         </p:spPr>
+        <p:txBody>
+          <a:bodyPr/>
+          <a:lstStyle/>
+          <a:p>
+            <a:endParaRPr lang="fr-FR"/>
+          </a:p>
+        </p:txBody>
       </p:sp>
       <p:sp>
         <p:nvSpPr>
@@ -4569,7 +4632,7 @@
           <a:bodyPr wrap="square" rtlCol="0" anchor="ctr"/>
           <a:lstStyle/>
           <a:p>
-            <a:pPr indent="0" marL="0">
+            <a:pPr marL="0" indent="0">
               <a:buNone/>
             </a:pPr>
             <a:r>
@@ -4611,6 +4674,13 @@
             <a:prstDash val="solid"/>
           </a:ln>
         </p:spPr>
+        <p:txBody>
+          <a:bodyPr/>
+          <a:lstStyle/>
+          <a:p>
+            <a:endParaRPr lang="fr-FR"/>
+          </a:p>
+        </p:txBody>
       </p:sp>
       <p:sp>
         <p:nvSpPr>
@@ -4633,7 +4703,7 @@
           <a:bodyPr wrap="square" rtlCol="0" anchor="ctr"/>
           <a:lstStyle/>
           <a:p>
-            <a:pPr indent="0" marL="0">
+            <a:pPr marL="0" indent="0">
               <a:buNone/>
             </a:pPr>
             <a:r>
@@ -4675,6 +4745,13 @@
             <a:prstDash val="solid"/>
           </a:ln>
         </p:spPr>
+        <p:txBody>
+          <a:bodyPr/>
+          <a:lstStyle/>
+          <a:p>
+            <a:endParaRPr lang="fr-FR"/>
+          </a:p>
+        </p:txBody>
       </p:sp>
       <p:sp>
         <p:nvSpPr>
@@ -4697,7 +4774,7 @@
           <a:bodyPr wrap="square" rtlCol="0" anchor="ctr"/>
           <a:lstStyle/>
           <a:p>
-            <a:pPr indent="0" marL="0">
+            <a:pPr marL="0" indent="0">
               <a:buNone/>
             </a:pPr>
             <a:r>
@@ -4739,6 +4816,13 @@
             <a:prstDash val="solid"/>
           </a:ln>
         </p:spPr>
+        <p:txBody>
+          <a:bodyPr/>
+          <a:lstStyle/>
+          <a:p>
+            <a:endParaRPr lang="fr-FR"/>
+          </a:p>
+        </p:txBody>
       </p:sp>
       <p:sp>
         <p:nvSpPr>
@@ -4761,7 +4845,7 @@
           <a:bodyPr wrap="square" rtlCol="0" anchor="ctr"/>
           <a:lstStyle/>
           <a:p>
-            <a:pPr indent="0" marL="0">
+            <a:pPr marL="0" indent="0">
               <a:buNone/>
             </a:pPr>
             <a:r>
@@ -4803,6 +4887,13 @@
             <a:prstDash val="solid"/>
           </a:ln>
         </p:spPr>
+        <p:txBody>
+          <a:bodyPr/>
+          <a:lstStyle/>
+          <a:p>
+            <a:endParaRPr lang="fr-FR"/>
+          </a:p>
+        </p:txBody>
       </p:sp>
       <p:sp>
         <p:nvSpPr>
@@ -4825,7 +4916,7 @@
           <a:bodyPr wrap="square" lIns="0" tIns="0" rIns="0" bIns="0" rtlCol="0" anchor="ctr"/>
           <a:lstStyle/>
           <a:p>
-            <a:pPr algn="l" indent="0" marL="0">
+            <a:pPr marL="0" indent="0" algn="l">
               <a:buNone/>
             </a:pPr>
             <a:r>
@@ -4856,6 +4947,7 @@
         <a:solidFill>
           <a:srgbClr val="F0F7FF"/>
         </a:solidFill>
+        <a:effectLst/>
       </p:bgPr>
     </p:bg>
     <p:spTree>
@@ -4896,6 +4988,13 @@
             <a:prstDash val="solid"/>
           </a:ln>
         </p:spPr>
+        <p:txBody>
+          <a:bodyPr/>
+          <a:lstStyle/>
+          <a:p>
+            <a:endParaRPr lang="fr-FR"/>
+          </a:p>
+        </p:txBody>
       </p:sp>
       <p:sp>
         <p:nvSpPr>
@@ -4921,6 +5020,13 @@
             <a:prstDash val="solid"/>
           </a:ln>
         </p:spPr>
+        <p:txBody>
+          <a:bodyPr/>
+          <a:lstStyle/>
+          <a:p>
+            <a:endParaRPr lang="fr-FR"/>
+          </a:p>
+        </p:txBody>
       </p:sp>
       <p:sp>
         <p:nvSpPr>
@@ -4943,7 +5049,7 @@
           <a:bodyPr wrap="square" rtlCol="0" anchor="ctr"/>
           <a:lstStyle/>
           <a:p>
-            <a:pPr indent="0" marL="0">
+            <a:pPr marL="0" indent="0">
               <a:buNone/>
             </a:pPr>
             <a:r>
@@ -4982,7 +5088,7 @@
           <a:bodyPr wrap="square" lIns="0" tIns="0" rIns="0" bIns="0" rtlCol="0" anchor="ctr"/>
           <a:lstStyle/>
           <a:p>
-            <a:pPr algn="r" indent="0" marL="0">
+            <a:pPr marL="0" indent="0" algn="r">
               <a:buNone/>
             </a:pPr>
             <a:r>
@@ -5021,13 +5127,20 @@
             <a:prstDash val="solid"/>
           </a:ln>
           <a:effectLst>
-            <a:outerShdw sx="100000" sy="100000" kx="0" ky="0" algn="bl" rotWithShape="0" blurRad="76200" dist="25400" dir="8100000">
+            <a:outerShdw blurRad="76200" dist="25400" dir="8100000" algn="bl" rotWithShape="0">
               <a:srgbClr val="000000">
                 <a:alpha val="10000"/>
               </a:srgbClr>
             </a:outerShdw>
           </a:effectLst>
         </p:spPr>
+        <p:txBody>
+          <a:bodyPr/>
+          <a:lstStyle/>
+          <a:p>
+            <a:endParaRPr lang="fr-FR"/>
+          </a:p>
+        </p:txBody>
       </p:sp>
       <p:sp>
         <p:nvSpPr>
@@ -5053,6 +5166,13 @@
             <a:prstDash val="solid"/>
           </a:ln>
         </p:spPr>
+        <p:txBody>
+          <a:bodyPr/>
+          <a:lstStyle/>
+          <a:p>
+            <a:endParaRPr lang="fr-FR"/>
+          </a:p>
+        </p:txBody>
       </p:sp>
       <p:sp>
         <p:nvSpPr>
@@ -5075,7 +5195,7 @@
           <a:bodyPr wrap="square" lIns="0" tIns="0" rIns="0" bIns="0" rtlCol="0" anchor="ctr"/>
           <a:lstStyle/>
           <a:p>
-            <a:pPr algn="ctr" indent="0" marL="0">
+            <a:pPr marL="0" indent="0" algn="ctr">
               <a:buNone/>
             </a:pPr>
             <a:r>
@@ -5114,6 +5234,13 @@
             <a:prstDash val="solid"/>
           </a:ln>
         </p:spPr>
+        <p:txBody>
+          <a:bodyPr/>
+          <a:lstStyle/>
+          <a:p>
+            <a:endParaRPr lang="fr-FR"/>
+          </a:p>
+        </p:txBody>
       </p:sp>
       <p:sp>
         <p:nvSpPr>
@@ -5136,7 +5263,7 @@
           <a:bodyPr wrap="square" rtlCol="0" anchor="ctr"/>
           <a:lstStyle/>
           <a:p>
-            <a:pPr indent="0" marL="0">
+            <a:pPr marL="0" indent="0">
               <a:buNone/>
             </a:pPr>
             <a:r>
@@ -5175,7 +5302,7 @@
           <a:bodyPr wrap="square" rtlCol="0" anchor="t"/>
           <a:lstStyle/>
           <a:p>
-            <a:pPr indent="0" marL="0">
+            <a:pPr marL="0" indent="0">
               <a:buNone/>
             </a:pPr>
             <a:r>
@@ -5217,13 +5344,20 @@
             <a:prstDash val="solid"/>
           </a:ln>
           <a:effectLst>
-            <a:outerShdw sx="100000" sy="100000" kx="0" ky="0" algn="bl" rotWithShape="0" blurRad="76200" dist="25400" dir="8100000">
+            <a:outerShdw blurRad="76200" dist="25400" dir="8100000" algn="bl" rotWithShape="0">
               <a:srgbClr val="000000">
                 <a:alpha val="10000"/>
               </a:srgbClr>
             </a:outerShdw>
           </a:effectLst>
         </p:spPr>
+        <p:txBody>
+          <a:bodyPr/>
+          <a:lstStyle/>
+          <a:p>
+            <a:endParaRPr lang="fr-FR"/>
+          </a:p>
+        </p:txBody>
       </p:sp>
       <p:sp>
         <p:nvSpPr>
@@ -5249,6 +5383,13 @@
             <a:prstDash val="solid"/>
           </a:ln>
         </p:spPr>
+        <p:txBody>
+          <a:bodyPr/>
+          <a:lstStyle/>
+          <a:p>
+            <a:endParaRPr lang="fr-FR"/>
+          </a:p>
+        </p:txBody>
       </p:sp>
       <p:sp>
         <p:nvSpPr>
@@ -5271,7 +5412,7 @@
           <a:bodyPr wrap="square" lIns="0" tIns="0" rIns="0" bIns="0" rtlCol="0" anchor="ctr"/>
           <a:lstStyle/>
           <a:p>
-            <a:pPr algn="ctr" indent="0" marL="0">
+            <a:pPr marL="0" indent="0" algn="ctr">
               <a:buNone/>
             </a:pPr>
             <a:r>
@@ -5310,6 +5451,13 @@
             <a:prstDash val="solid"/>
           </a:ln>
         </p:spPr>
+        <p:txBody>
+          <a:bodyPr/>
+          <a:lstStyle/>
+          <a:p>
+            <a:endParaRPr lang="fr-FR"/>
+          </a:p>
+        </p:txBody>
       </p:sp>
       <p:sp>
         <p:nvSpPr>
@@ -5332,7 +5480,7 @@
           <a:bodyPr wrap="square" rtlCol="0" anchor="ctr"/>
           <a:lstStyle/>
           <a:p>
-            <a:pPr indent="0" marL="0">
+            <a:pPr marL="0" indent="0">
               <a:buNone/>
             </a:pPr>
             <a:r>
@@ -5371,7 +5519,7 @@
           <a:bodyPr wrap="square" rtlCol="0" anchor="t"/>
           <a:lstStyle/>
           <a:p>
-            <a:pPr indent="0" marL="0">
+            <a:pPr marL="0" indent="0">
               <a:buNone/>
             </a:pPr>
             <a:r>
@@ -5413,13 +5561,20 @@
             <a:prstDash val="solid"/>
           </a:ln>
           <a:effectLst>
-            <a:outerShdw sx="100000" sy="100000" kx="0" ky="0" algn="bl" rotWithShape="0" blurRad="76200" dist="25400" dir="8100000">
+            <a:outerShdw blurRad="76200" dist="25400" dir="8100000" algn="bl" rotWithShape="0">
               <a:srgbClr val="000000">
                 <a:alpha val="10000"/>
               </a:srgbClr>
             </a:outerShdw>
           </a:effectLst>
         </p:spPr>
+        <p:txBody>
+          <a:bodyPr/>
+          <a:lstStyle/>
+          <a:p>
+            <a:endParaRPr lang="fr-FR"/>
+          </a:p>
+        </p:txBody>
       </p:sp>
       <p:sp>
         <p:nvSpPr>
@@ -5445,6 +5600,13 @@
             <a:prstDash val="solid"/>
           </a:ln>
         </p:spPr>
+        <p:txBody>
+          <a:bodyPr/>
+          <a:lstStyle/>
+          <a:p>
+            <a:endParaRPr lang="fr-FR"/>
+          </a:p>
+        </p:txBody>
       </p:sp>
       <p:sp>
         <p:nvSpPr>
@@ -5467,7 +5629,7 @@
           <a:bodyPr wrap="square" lIns="0" tIns="0" rIns="0" bIns="0" rtlCol="0" anchor="ctr"/>
           <a:lstStyle/>
           <a:p>
-            <a:pPr algn="ctr" indent="0" marL="0">
+            <a:pPr marL="0" indent="0" algn="ctr">
               <a:buNone/>
             </a:pPr>
             <a:r>
@@ -5506,6 +5668,13 @@
             <a:prstDash val="solid"/>
           </a:ln>
         </p:spPr>
+        <p:txBody>
+          <a:bodyPr/>
+          <a:lstStyle/>
+          <a:p>
+            <a:endParaRPr lang="fr-FR"/>
+          </a:p>
+        </p:txBody>
       </p:sp>
       <p:sp>
         <p:nvSpPr>
@@ -5528,7 +5697,7 @@
           <a:bodyPr wrap="square" rtlCol="0" anchor="ctr"/>
           <a:lstStyle/>
           <a:p>
-            <a:pPr indent="0" marL="0">
+            <a:pPr marL="0" indent="0">
               <a:buNone/>
             </a:pPr>
             <a:r>
@@ -5567,7 +5736,7 @@
           <a:bodyPr wrap="square" rtlCol="0" anchor="t"/>
           <a:lstStyle/>
           <a:p>
-            <a:pPr indent="0" marL="0">
+            <a:pPr marL="0" indent="0">
               <a:buNone/>
             </a:pPr>
             <a:r>
@@ -5609,6 +5778,13 @@
             <a:prstDash val="solid"/>
           </a:ln>
         </p:spPr>
+        <p:txBody>
+          <a:bodyPr/>
+          <a:lstStyle/>
+          <a:p>
+            <a:endParaRPr lang="fr-FR"/>
+          </a:p>
+        </p:txBody>
       </p:sp>
       <p:sp>
         <p:nvSpPr>
@@ -5631,7 +5807,7 @@
           <a:bodyPr wrap="square" lIns="0" tIns="0" rIns="0" bIns="0" rtlCol="0" anchor="ctr"/>
           <a:lstStyle/>
           <a:p>
-            <a:pPr algn="l" indent="0" marL="0">
+            <a:pPr marL="0" indent="0" algn="l">
               <a:buNone/>
             </a:pPr>
             <a:r>
@@ -5662,6 +5838,7 @@
         <a:solidFill>
           <a:srgbClr val="F0F7FF"/>
         </a:solidFill>
+        <a:effectLst/>
       </p:bgPr>
     </p:bg>
     <p:spTree>
@@ -5702,6 +5879,13 @@
             <a:prstDash val="solid"/>
           </a:ln>
         </p:spPr>
+        <p:txBody>
+          <a:bodyPr/>
+          <a:lstStyle/>
+          <a:p>
+            <a:endParaRPr lang="fr-FR"/>
+          </a:p>
+        </p:txBody>
       </p:sp>
       <p:sp>
         <p:nvSpPr>
@@ -5727,6 +5911,13 @@
             <a:prstDash val="solid"/>
           </a:ln>
         </p:spPr>
+        <p:txBody>
+          <a:bodyPr/>
+          <a:lstStyle/>
+          <a:p>
+            <a:endParaRPr lang="fr-FR"/>
+          </a:p>
+        </p:txBody>
       </p:sp>
       <p:sp>
         <p:nvSpPr>
@@ -5749,7 +5940,7 @@
           <a:bodyPr wrap="square" rtlCol="0" anchor="ctr"/>
           <a:lstStyle/>
           <a:p>
-            <a:pPr indent="0" marL="0">
+            <a:pPr marL="0" indent="0">
               <a:buNone/>
             </a:pPr>
             <a:r>
@@ -5788,7 +5979,7 @@
           <a:bodyPr wrap="square" lIns="0" tIns="0" rIns="0" bIns="0" rtlCol="0" anchor="ctr"/>
           <a:lstStyle/>
           <a:p>
-            <a:pPr algn="r" indent="0" marL="0">
+            <a:pPr marL="0" indent="0" algn="r">
               <a:buNone/>
             </a:pPr>
             <a:r>
@@ -5827,13 +6018,20 @@
             <a:prstDash val="solid"/>
           </a:ln>
           <a:effectLst>
-            <a:outerShdw sx="100000" sy="100000" kx="0" ky="0" algn="bl" rotWithShape="0" blurRad="76200" dist="25400" dir="8100000">
+            <a:outerShdw blurRad="76200" dist="25400" dir="8100000" algn="bl" rotWithShape="0">
               <a:srgbClr val="000000">
                 <a:alpha val="8000"/>
               </a:srgbClr>
             </a:outerShdw>
           </a:effectLst>
         </p:spPr>
+        <p:txBody>
+          <a:bodyPr/>
+          <a:lstStyle/>
+          <a:p>
+            <a:endParaRPr lang="fr-FR"/>
+          </a:p>
+        </p:txBody>
       </p:sp>
       <p:sp>
         <p:nvSpPr>
@@ -5859,6 +6057,13 @@
             <a:prstDash val="solid"/>
           </a:ln>
         </p:spPr>
+        <p:txBody>
+          <a:bodyPr/>
+          <a:lstStyle/>
+          <a:p>
+            <a:endParaRPr lang="fr-FR"/>
+          </a:p>
+        </p:txBody>
       </p:sp>
       <p:sp>
         <p:nvSpPr>
@@ -5881,7 +6086,7 @@
           <a:bodyPr wrap="square" lIns="0" tIns="0" rIns="0" bIns="0" rtlCol="0" anchor="ctr"/>
           <a:lstStyle/>
           <a:p>
-            <a:pPr algn="ctr" indent="0" marL="0">
+            <a:pPr marL="0" indent="0" algn="ctr">
               <a:buNone/>
             </a:pPr>
             <a:r>
@@ -5920,6 +6125,13 @@
             <a:prstDash val="solid"/>
           </a:ln>
         </p:spPr>
+        <p:txBody>
+          <a:bodyPr/>
+          <a:lstStyle/>
+          <a:p>
+            <a:endParaRPr lang="fr-FR"/>
+          </a:p>
+        </p:txBody>
       </p:sp>
       <p:sp>
         <p:nvSpPr>
@@ -5942,7 +6154,7 @@
           <a:bodyPr wrap="square" lIns="0" tIns="0" rIns="0" bIns="0" rtlCol="0" anchor="ctr"/>
           <a:lstStyle/>
           <a:p>
-            <a:pPr algn="ctr" indent="0" marL="0">
+            <a:pPr marL="0" indent="0" algn="ctr">
               <a:buNone/>
             </a:pPr>
             <a:r>
@@ -5978,7 +6190,7 @@
           <a:bodyPr wrap="square" rtlCol="0" anchor="ctr"/>
           <a:lstStyle/>
           <a:p>
-            <a:pPr indent="0" marL="0">
+            <a:pPr marL="0" indent="0">
               <a:buNone/>
             </a:pPr>
             <a:r>
@@ -6017,7 +6229,7 @@
           <a:bodyPr wrap="square" rtlCol="0" anchor="ctr"/>
           <a:lstStyle/>
           <a:p>
-            <a:pPr indent="0" marL="0">
+            <a:pPr marL="0" indent="0">
               <a:buNone/>
             </a:pPr>
             <a:r>
@@ -6059,6 +6271,13 @@
             <a:prstDash val="solid"/>
           </a:ln>
         </p:spPr>
+        <p:txBody>
+          <a:bodyPr/>
+          <a:lstStyle/>
+          <a:p>
+            <a:endParaRPr lang="fr-FR"/>
+          </a:p>
+        </p:txBody>
       </p:sp>
       <p:sp>
         <p:nvSpPr>
@@ -6081,7 +6300,7 @@
           <a:bodyPr wrap="square" lIns="0" tIns="0" rIns="0" bIns="0" rtlCol="0" anchor="ctr"/>
           <a:lstStyle/>
           <a:p>
-            <a:pPr algn="ctr" indent="0" marL="0">
+            <a:pPr marL="0" indent="0" algn="ctr">
               <a:buNone/>
             </a:pPr>
             <a:r>
@@ -6117,7 +6336,7 @@
           <a:bodyPr wrap="square" rtlCol="0" anchor="ctr"/>
           <a:lstStyle/>
           <a:p>
-            <a:pPr indent="0" marL="0">
+            <a:pPr marL="0" indent="0">
               <a:buNone/>
             </a:pPr>
             <a:r>
@@ -6156,7 +6375,7 @@
           <a:bodyPr wrap="square" rtlCol="0" anchor="ctr"/>
           <a:lstStyle/>
           <a:p>
-            <a:pPr indent="0" marL="0">
+            <a:pPr marL="0" indent="0">
               <a:buNone/>
             </a:pPr>
             <a:r>
@@ -6198,6 +6417,13 @@
             <a:prstDash val="solid"/>
           </a:ln>
         </p:spPr>
+        <p:txBody>
+          <a:bodyPr/>
+          <a:lstStyle/>
+          <a:p>
+            <a:endParaRPr lang="fr-FR"/>
+          </a:p>
+        </p:txBody>
       </p:sp>
       <p:sp>
         <p:nvSpPr>
@@ -6220,7 +6446,7 @@
           <a:bodyPr wrap="square" lIns="0" tIns="0" rIns="0" bIns="0" rtlCol="0" anchor="ctr"/>
           <a:lstStyle/>
           <a:p>
-            <a:pPr algn="ctr" indent="0" marL="0">
+            <a:pPr marL="0" indent="0" algn="ctr">
               <a:buNone/>
             </a:pPr>
             <a:r>
@@ -6256,7 +6482,7 @@
           <a:bodyPr wrap="square" rtlCol="0" anchor="ctr"/>
           <a:lstStyle/>
           <a:p>
-            <a:pPr indent="0" marL="0">
+            <a:pPr marL="0" indent="0">
               <a:buNone/>
             </a:pPr>
             <a:r>
@@ -6295,7 +6521,7 @@
           <a:bodyPr wrap="square" rtlCol="0" anchor="ctr"/>
           <a:lstStyle/>
           <a:p>
-            <a:pPr indent="0" marL="0">
+            <a:pPr marL="0" indent="0">
               <a:buNone/>
             </a:pPr>
             <a:r>
@@ -6337,6 +6563,13 @@
             <a:prstDash val="solid"/>
           </a:ln>
         </p:spPr>
+        <p:txBody>
+          <a:bodyPr/>
+          <a:lstStyle/>
+          <a:p>
+            <a:endParaRPr lang="fr-FR"/>
+          </a:p>
+        </p:txBody>
       </p:sp>
       <p:sp>
         <p:nvSpPr>
@@ -6359,7 +6592,7 @@
           <a:bodyPr wrap="square" lIns="0" tIns="0" rIns="0" bIns="0" rtlCol="0" anchor="ctr"/>
           <a:lstStyle/>
           <a:p>
-            <a:pPr algn="ctr" indent="0" marL="0">
+            <a:pPr marL="0" indent="0" algn="ctr">
               <a:buNone/>
             </a:pPr>
             <a:r>
@@ -6395,7 +6628,7 @@
           <a:bodyPr wrap="square" rtlCol="0" anchor="ctr"/>
           <a:lstStyle/>
           <a:p>
-            <a:pPr indent="0" marL="0">
+            <a:pPr marL="0" indent="0">
               <a:buNone/>
             </a:pPr>
             <a:r>
@@ -6434,7 +6667,7 @@
           <a:bodyPr wrap="square" rtlCol="0" anchor="ctr"/>
           <a:lstStyle/>
           <a:p>
-            <a:pPr indent="0" marL="0">
+            <a:pPr marL="0" indent="0">
               <a:buNone/>
             </a:pPr>
             <a:r>
@@ -6476,13 +6709,20 @@
             <a:prstDash val="solid"/>
           </a:ln>
           <a:effectLst>
-            <a:outerShdw sx="100000" sy="100000" kx="0" ky="0" algn="bl" rotWithShape="0" blurRad="76200" dist="25400" dir="8100000">
+            <a:outerShdw blurRad="76200" dist="25400" dir="8100000" algn="bl" rotWithShape="0">
               <a:srgbClr val="000000">
                 <a:alpha val="8000"/>
               </a:srgbClr>
             </a:outerShdw>
           </a:effectLst>
         </p:spPr>
+        <p:txBody>
+          <a:bodyPr/>
+          <a:lstStyle/>
+          <a:p>
+            <a:endParaRPr lang="fr-FR"/>
+          </a:p>
+        </p:txBody>
       </p:sp>
       <p:sp>
         <p:nvSpPr>
@@ -6508,6 +6748,13 @@
             <a:prstDash val="solid"/>
           </a:ln>
         </p:spPr>
+        <p:txBody>
+          <a:bodyPr/>
+          <a:lstStyle/>
+          <a:p>
+            <a:endParaRPr lang="fr-FR"/>
+          </a:p>
+        </p:txBody>
       </p:sp>
       <p:sp>
         <p:nvSpPr>
@@ -6530,7 +6777,7 @@
           <a:bodyPr wrap="square" lIns="0" tIns="0" rIns="0" bIns="0" rtlCol="0" anchor="ctr"/>
           <a:lstStyle/>
           <a:p>
-            <a:pPr algn="ctr" indent="0" marL="0">
+            <a:pPr marL="0" indent="0" algn="ctr">
               <a:buNone/>
             </a:pPr>
             <a:r>
@@ -6569,6 +6816,13 @@
             <a:prstDash val="solid"/>
           </a:ln>
         </p:spPr>
+        <p:txBody>
+          <a:bodyPr/>
+          <a:lstStyle/>
+          <a:p>
+            <a:endParaRPr lang="fr-FR"/>
+          </a:p>
+        </p:txBody>
       </p:sp>
       <p:sp>
         <p:nvSpPr>
@@ -6591,7 +6845,7 @@
           <a:bodyPr wrap="square" lIns="0" tIns="0" rIns="0" bIns="0" rtlCol="0" anchor="ctr"/>
           <a:lstStyle/>
           <a:p>
-            <a:pPr algn="ctr" indent="0" marL="0">
+            <a:pPr marL="0" indent="0" algn="ctr">
               <a:buNone/>
             </a:pPr>
             <a:r>
@@ -6627,7 +6881,7 @@
           <a:bodyPr wrap="square" rtlCol="0" anchor="ctr"/>
           <a:lstStyle/>
           <a:p>
-            <a:pPr indent="0" marL="0">
+            <a:pPr marL="0" indent="0">
               <a:buNone/>
             </a:pPr>
             <a:r>
@@ -6666,7 +6920,7 @@
           <a:bodyPr wrap="square" rtlCol="0" anchor="ctr"/>
           <a:lstStyle/>
           <a:p>
-            <a:pPr indent="0" marL="0">
+            <a:pPr marL="0" indent="0">
               <a:buNone/>
             </a:pPr>
             <a:r>
@@ -6708,6 +6962,13 @@
             <a:prstDash val="solid"/>
           </a:ln>
         </p:spPr>
+        <p:txBody>
+          <a:bodyPr/>
+          <a:lstStyle/>
+          <a:p>
+            <a:endParaRPr lang="fr-FR"/>
+          </a:p>
+        </p:txBody>
       </p:sp>
       <p:sp>
         <p:nvSpPr>
@@ -6730,7 +6991,7 @@
           <a:bodyPr wrap="square" lIns="0" tIns="0" rIns="0" bIns="0" rtlCol="0" anchor="ctr"/>
           <a:lstStyle/>
           <a:p>
-            <a:pPr algn="ctr" indent="0" marL="0">
+            <a:pPr marL="0" indent="0" algn="ctr">
               <a:buNone/>
             </a:pPr>
             <a:r>
@@ -6766,7 +7027,7 @@
           <a:bodyPr wrap="square" rtlCol="0" anchor="ctr"/>
           <a:lstStyle/>
           <a:p>
-            <a:pPr indent="0" marL="0">
+            <a:pPr marL="0" indent="0">
               <a:buNone/>
             </a:pPr>
             <a:r>
@@ -6805,7 +7066,7 @@
           <a:bodyPr wrap="square" rtlCol="0" anchor="ctr"/>
           <a:lstStyle/>
           <a:p>
-            <a:pPr indent="0" marL="0">
+            <a:pPr marL="0" indent="0">
               <a:buNone/>
             </a:pPr>
             <a:r>
@@ -6847,6 +7108,13 @@
             <a:prstDash val="solid"/>
           </a:ln>
         </p:spPr>
+        <p:txBody>
+          <a:bodyPr/>
+          <a:lstStyle/>
+          <a:p>
+            <a:endParaRPr lang="fr-FR"/>
+          </a:p>
+        </p:txBody>
       </p:sp>
       <p:sp>
         <p:nvSpPr>
@@ -6869,7 +7137,7 @@
           <a:bodyPr wrap="square" lIns="0" tIns="0" rIns="0" bIns="0" rtlCol="0" anchor="ctr"/>
           <a:lstStyle/>
           <a:p>
-            <a:pPr algn="ctr" indent="0" marL="0">
+            <a:pPr marL="0" indent="0" algn="ctr">
               <a:buNone/>
             </a:pPr>
             <a:r>
@@ -6905,7 +7173,7 @@
           <a:bodyPr wrap="square" rtlCol="0" anchor="ctr"/>
           <a:lstStyle/>
           <a:p>
-            <a:pPr indent="0" marL="0">
+            <a:pPr marL="0" indent="0">
               <a:buNone/>
             </a:pPr>
             <a:r>
@@ -6944,7 +7212,7 @@
           <a:bodyPr wrap="square" rtlCol="0" anchor="ctr"/>
           <a:lstStyle/>
           <a:p>
-            <a:pPr indent="0" marL="0">
+            <a:pPr marL="0" indent="0">
               <a:buNone/>
             </a:pPr>
             <a:r>
@@ -6986,6 +7254,13 @@
             <a:prstDash val="solid"/>
           </a:ln>
         </p:spPr>
+        <p:txBody>
+          <a:bodyPr/>
+          <a:lstStyle/>
+          <a:p>
+            <a:endParaRPr lang="fr-FR"/>
+          </a:p>
+        </p:txBody>
       </p:sp>
       <p:sp>
         <p:nvSpPr>
@@ -7008,7 +7283,7 @@
           <a:bodyPr wrap="square" lIns="0" tIns="0" rIns="0" bIns="0" rtlCol="0" anchor="ctr"/>
           <a:lstStyle/>
           <a:p>
-            <a:pPr algn="ctr" indent="0" marL="0">
+            <a:pPr marL="0" indent="0" algn="ctr">
               <a:buNone/>
             </a:pPr>
             <a:r>
@@ -7044,7 +7319,7 @@
           <a:bodyPr wrap="square" rtlCol="0" anchor="ctr"/>
           <a:lstStyle/>
           <a:p>
-            <a:pPr indent="0" marL="0">
+            <a:pPr marL="0" indent="0">
               <a:buNone/>
             </a:pPr>
             <a:r>
@@ -7083,7 +7358,7 @@
           <a:bodyPr wrap="square" rtlCol="0" anchor="ctr"/>
           <a:lstStyle/>
           <a:p>
-            <a:pPr indent="0" marL="0">
+            <a:pPr marL="0" indent="0">
               <a:buNone/>
             </a:pPr>
             <a:r>
@@ -7125,6 +7400,13 @@
             <a:prstDash val="solid"/>
           </a:ln>
         </p:spPr>
+        <p:txBody>
+          <a:bodyPr/>
+          <a:lstStyle/>
+          <a:p>
+            <a:endParaRPr lang="fr-FR"/>
+          </a:p>
+        </p:txBody>
       </p:sp>
       <p:sp>
         <p:nvSpPr>
@@ -7147,7 +7429,7 @@
           <a:bodyPr wrap="square" lIns="0" tIns="0" rIns="0" bIns="0" rtlCol="0" anchor="ctr"/>
           <a:lstStyle/>
           <a:p>
-            <a:pPr algn="l" indent="0" marL="0">
+            <a:pPr marL="0" indent="0" algn="l">
               <a:buNone/>
             </a:pPr>
             <a:r>
@@ -7178,6 +7460,7 @@
         <a:solidFill>
           <a:srgbClr val="0B2C4A"/>
         </a:solidFill>
+        <a:effectLst/>
       </p:bgPr>
     </p:bg>
     <p:spTree>
@@ -7218,6 +7501,13 @@
             <a:prstDash val="solid"/>
           </a:ln>
         </p:spPr>
+        <p:txBody>
+          <a:bodyPr/>
+          <a:lstStyle/>
+          <a:p>
+            <a:endParaRPr lang="fr-FR"/>
+          </a:p>
+        </p:txBody>
       </p:sp>
       <p:sp>
         <p:nvSpPr>
@@ -7243,6 +7533,13 @@
             <a:prstDash val="solid"/>
           </a:ln>
         </p:spPr>
+        <p:txBody>
+          <a:bodyPr/>
+          <a:lstStyle/>
+          <a:p>
+            <a:endParaRPr lang="fr-FR"/>
+          </a:p>
+        </p:txBody>
       </p:sp>
       <p:sp>
         <p:nvSpPr>
@@ -7265,7 +7562,7 @@
           <a:bodyPr wrap="square" rtlCol="0" anchor="ctr"/>
           <a:lstStyle/>
           <a:p>
-            <a:pPr indent="0" marL="0">
+            <a:pPr marL="0" indent="0">
               <a:buNone/>
             </a:pPr>
             <a:r>
@@ -7307,6 +7604,13 @@
             <a:prstDash val="solid"/>
           </a:ln>
         </p:spPr>
+        <p:txBody>
+          <a:bodyPr/>
+          <a:lstStyle/>
+          <a:p>
+            <a:endParaRPr lang="fr-FR"/>
+          </a:p>
+        </p:txBody>
       </p:sp>
       <p:sp>
         <p:nvSpPr>
@@ -7329,7 +7633,7 @@
           <a:bodyPr wrap="square" rtlCol="0" anchor="ctr"/>
           <a:lstStyle/>
           <a:p>
-            <a:pPr algn="ctr" indent="0" marL="0">
+            <a:pPr marL="0" indent="0" algn="ctr">
               <a:buNone/>
             </a:pPr>
             <a:r>
@@ -7346,7 +7650,7 @@
             <a:endParaRPr lang="en-US" sz="1350" dirty="0"/>
           </a:p>
           <a:p>
-            <a:pPr algn="ctr" indent="0" marL="0">
+            <a:pPr marL="0" indent="0" algn="ctr">
               <a:buNone/>
             </a:pPr>
             <a:r>
@@ -7388,6 +7692,13 @@
             <a:prstDash val="solid"/>
           </a:ln>
         </p:spPr>
+        <p:txBody>
+          <a:bodyPr/>
+          <a:lstStyle/>
+          <a:p>
+            <a:endParaRPr lang="fr-FR"/>
+          </a:p>
+        </p:txBody>
       </p:sp>
       <p:sp>
         <p:nvSpPr>
@@ -7410,7 +7721,7 @@
           <a:bodyPr wrap="square" lIns="0" tIns="0" rIns="0" bIns="0" rtlCol="0" anchor="ctr"/>
           <a:lstStyle/>
           <a:p>
-            <a:pPr algn="ctr" indent="0" marL="0">
+            <a:pPr marL="0" indent="0" algn="ctr">
               <a:buNone/>
             </a:pPr>
             <a:r>
@@ -7419,7 +7730,7 @@
                   <a:srgbClr val="FFFFFF"/>
                 </a:solidFill>
               </a:rPr>
-              <a:t>100%</a:t>
+              <a:t>99%</a:t>
             </a:r>
             <a:endParaRPr lang="en-US" sz="3200" dirty="0"/>
           </a:p>
@@ -7446,7 +7757,7 @@
           <a:bodyPr wrap="square" lIns="0" tIns="0" rIns="0" bIns="0" rtlCol="0" anchor="t"/>
           <a:lstStyle/>
           <a:p>
-            <a:pPr algn="ctr" indent="0" marL="0">
+            <a:pPr marL="0" indent="0" algn="ctr">
               <a:buNone/>
             </a:pPr>
             <a:r>
@@ -7460,7 +7771,7 @@
             <a:endParaRPr lang="en-US" sz="1100" dirty="0"/>
           </a:p>
           <a:p>
-            <a:pPr algn="ctr" indent="0" marL="0">
+            <a:pPr marL="0" indent="0" algn="ctr">
               <a:buNone/>
             </a:pPr>
             <a:r>
@@ -7499,6 +7810,13 @@
             <a:prstDash val="solid"/>
           </a:ln>
         </p:spPr>
+        <p:txBody>
+          <a:bodyPr/>
+          <a:lstStyle/>
+          <a:p>
+            <a:endParaRPr lang="fr-FR"/>
+          </a:p>
+        </p:txBody>
       </p:sp>
       <p:sp>
         <p:nvSpPr>
@@ -7521,7 +7839,7 @@
           <a:bodyPr wrap="square" lIns="0" tIns="0" rIns="0" bIns="0" rtlCol="0" anchor="ctr"/>
           <a:lstStyle/>
           <a:p>
-            <a:pPr algn="ctr" indent="0" marL="0">
+            <a:pPr marL="0" indent="0" algn="ctr">
               <a:buNone/>
             </a:pPr>
             <a:r>
@@ -7557,7 +7875,7 @@
           <a:bodyPr wrap="square" lIns="0" tIns="0" rIns="0" bIns="0" rtlCol="0" anchor="t"/>
           <a:lstStyle/>
           <a:p>
-            <a:pPr algn="ctr" indent="0" marL="0">
+            <a:pPr marL="0" indent="0" algn="ctr">
               <a:buNone/>
             </a:pPr>
             <a:r>
@@ -7571,7 +7889,7 @@
             <a:endParaRPr lang="en-US" sz="1100" dirty="0"/>
           </a:p>
           <a:p>
-            <a:pPr algn="ctr" indent="0" marL="0">
+            <a:pPr marL="0" indent="0" algn="ctr">
               <a:buNone/>
             </a:pPr>
             <a:r>
@@ -7610,6 +7928,13 @@
             <a:prstDash val="solid"/>
           </a:ln>
         </p:spPr>
+        <p:txBody>
+          <a:bodyPr/>
+          <a:lstStyle/>
+          <a:p>
+            <a:endParaRPr lang="fr-FR"/>
+          </a:p>
+        </p:txBody>
       </p:sp>
       <p:sp>
         <p:nvSpPr>
@@ -7632,7 +7957,7 @@
           <a:bodyPr wrap="square" lIns="0" tIns="0" rIns="0" bIns="0" rtlCol="0" anchor="ctr"/>
           <a:lstStyle/>
           <a:p>
-            <a:pPr algn="ctr" indent="0" marL="0">
+            <a:pPr marL="0" indent="0" algn="ctr">
               <a:buNone/>
             </a:pPr>
             <a:r>
@@ -7668,7 +7993,7 @@
           <a:bodyPr wrap="square" lIns="0" tIns="0" rIns="0" bIns="0" rtlCol="0" anchor="t"/>
           <a:lstStyle/>
           <a:p>
-            <a:pPr algn="ctr" indent="0" marL="0">
+            <a:pPr marL="0" indent="0" algn="ctr">
               <a:buNone/>
             </a:pPr>
             <a:r>
@@ -7682,7 +8007,7 @@
             <a:endParaRPr lang="en-US" sz="1100" dirty="0"/>
           </a:p>
           <a:p>
-            <a:pPr algn="ctr" indent="0" marL="0">
+            <a:pPr marL="0" indent="0" algn="ctr">
               <a:buNone/>
             </a:pPr>
             <a:r>
@@ -7721,6 +8046,13 @@
             <a:prstDash val="solid"/>
           </a:ln>
         </p:spPr>
+        <p:txBody>
+          <a:bodyPr/>
+          <a:lstStyle/>
+          <a:p>
+            <a:endParaRPr lang="fr-FR"/>
+          </a:p>
+        </p:txBody>
       </p:sp>
       <p:sp>
         <p:nvSpPr>
@@ -7743,7 +8075,7 @@
           <a:bodyPr wrap="square" rtlCol="0" anchor="ctr"/>
           <a:lstStyle/>
           <a:p>
-            <a:pPr indent="0" marL="0">
+            <a:pPr marL="0" indent="0">
               <a:buNone/>
             </a:pPr>
             <a:r>
@@ -7782,7 +8114,7 @@
           <a:bodyPr wrap="square" rtlCol="0" anchor="ctr"/>
           <a:lstStyle/>
           <a:p>
-            <a:pPr indent="0" marL="0">
+            <a:pPr marL="0" indent="0">
               <a:buNone/>
             </a:pPr>
             <a:r>
@@ -7821,7 +8153,7 @@
           <a:bodyPr wrap="square" rtlCol="0" anchor="ctr"/>
           <a:lstStyle/>
           <a:p>
-            <a:pPr algn="ctr" indent="0" marL="0">
+            <a:pPr marL="0" indent="0" algn="ctr">
               <a:buNone/>
             </a:pPr>
             <a:r>
@@ -8140,4 +8472,319 @@
     </a:ext>
   </a:extLst>
 </a:theme>
+</file>
+
+<file path=ppt/theme/theme2.xml><?xml version="1.0" encoding="utf-8"?>
+<a:theme xmlns:a="http://schemas.openxmlformats.org/drawingml/2006/main" name="Thème Office">
+  <a:themeElements>
+    <a:clrScheme name="Office">
+      <a:dk1>
+        <a:sysClr val="windowText" lastClr="000000"/>
+      </a:dk1>
+      <a:lt1>
+        <a:sysClr val="window" lastClr="FFFFFF"/>
+      </a:lt1>
+      <a:dk2>
+        <a:srgbClr val="0E2841"/>
+      </a:dk2>
+      <a:lt2>
+        <a:srgbClr val="E8E8E8"/>
+      </a:lt2>
+      <a:accent1>
+        <a:srgbClr val="156082"/>
+      </a:accent1>
+      <a:accent2>
+        <a:srgbClr val="E97132"/>
+      </a:accent2>
+      <a:accent3>
+        <a:srgbClr val="196B24"/>
+      </a:accent3>
+      <a:accent4>
+        <a:srgbClr val="0F9ED5"/>
+      </a:accent4>
+      <a:accent5>
+        <a:srgbClr val="A02B93"/>
+      </a:accent5>
+      <a:accent6>
+        <a:srgbClr val="4EA72E"/>
+      </a:accent6>
+      <a:hlink>
+        <a:srgbClr val="467886"/>
+      </a:hlink>
+      <a:folHlink>
+        <a:srgbClr val="96607D"/>
+      </a:folHlink>
+    </a:clrScheme>
+    <a:fontScheme name="Office">
+      <a:majorFont>
+        <a:latin typeface="Aptos Display" panose="02110004020202020204"/>
+        <a:ea typeface=""/>
+        <a:cs typeface=""/>
+        <a:font script="Jpan" typeface="游ゴシック Light"/>
+        <a:font script="Hang" typeface="맑은 고딕"/>
+        <a:font script="Hans" typeface="等线 Light"/>
+        <a:font script="Hant" typeface="新細明體"/>
+        <a:font script="Arab" typeface="Times New Roman"/>
+        <a:font script="Hebr" typeface="Times New Roman"/>
+        <a:font script="Thai" typeface="Angsana New"/>
+        <a:font script="Ethi" typeface="Nyala"/>
+        <a:font script="Beng" typeface="Vrinda"/>
+        <a:font script="Gujr" typeface="Shruti"/>
+        <a:font script="Khmr" typeface="MoolBoran"/>
+        <a:font script="Knda" typeface="Tunga"/>
+        <a:font script="Guru" typeface="Raavi"/>
+        <a:font script="Cans" typeface="Euphemia"/>
+        <a:font script="Cher" typeface="Plantagenet Cherokee"/>
+        <a:font script="Yiii" typeface="Microsoft Yi Baiti"/>
+        <a:font script="Tibt" typeface="Microsoft Himalaya"/>
+        <a:font script="Thaa" typeface="MV Boli"/>
+        <a:font script="Deva" typeface="Mangal"/>
+        <a:font script="Telu" typeface="Gautami"/>
+        <a:font script="Taml" typeface="Latha"/>
+        <a:font script="Syrc" typeface="Estrangelo Edessa"/>
+        <a:font script="Orya" typeface="Kalinga"/>
+        <a:font script="Mlym" typeface="Kartika"/>
+        <a:font script="Laoo" typeface="DokChampa"/>
+        <a:font script="Sinh" typeface="Iskoola Pota"/>
+        <a:font script="Mong" typeface="Mongolian Baiti"/>
+        <a:font script="Viet" typeface="Times New Roman"/>
+        <a:font script="Uigh" typeface="Microsoft Uighur"/>
+        <a:font script="Geor" typeface="Sylfaen"/>
+        <a:font script="Armn" typeface="Arial"/>
+        <a:font script="Bugi" typeface="Leelawadee UI"/>
+        <a:font script="Bopo" typeface="Microsoft JhengHei"/>
+        <a:font script="Java" typeface="Javanese Text"/>
+        <a:font script="Lisu" typeface="Segoe UI"/>
+        <a:font script="Mymr" typeface="Myanmar Text"/>
+        <a:font script="Nkoo" typeface="Ebrima"/>
+        <a:font script="Olck" typeface="Nirmala UI"/>
+        <a:font script="Osma" typeface="Ebrima"/>
+        <a:font script="Phag" typeface="Phagspa"/>
+        <a:font script="Syrn" typeface="Estrangelo Edessa"/>
+        <a:font script="Syrj" typeface="Estrangelo Edessa"/>
+        <a:font script="Syre" typeface="Estrangelo Edessa"/>
+        <a:font script="Sora" typeface="Nirmala UI"/>
+        <a:font script="Tale" typeface="Microsoft Tai Le"/>
+        <a:font script="Talu" typeface="Microsoft New Tai Lue"/>
+        <a:font script="Tfng" typeface="Ebrima"/>
+      </a:majorFont>
+      <a:minorFont>
+        <a:latin typeface="Aptos" panose="02110004020202020204"/>
+        <a:ea typeface=""/>
+        <a:cs typeface=""/>
+        <a:font script="Jpan" typeface="游ゴシック"/>
+        <a:font script="Hang" typeface="맑은 고딕"/>
+        <a:font script="Hans" typeface="等线"/>
+        <a:font script="Hant" typeface="新細明體"/>
+        <a:font script="Arab" typeface="Arial"/>
+        <a:font script="Hebr" typeface="Arial"/>
+        <a:font script="Thai" typeface="Cordia New"/>
+        <a:font script="Ethi" typeface="Nyala"/>
+        <a:font script="Beng" typeface="Vrinda"/>
+        <a:font script="Gujr" typeface="Shruti"/>
+        <a:font script="Khmr" typeface="DaunPenh"/>
+        <a:font script="Knda" typeface="Tunga"/>
+        <a:font script="Guru" typeface="Raavi"/>
+        <a:font script="Cans" typeface="Euphemia"/>
+        <a:font script="Cher" typeface="Plantagenet Cherokee"/>
+        <a:font script="Yiii" typeface="Microsoft Yi Baiti"/>
+        <a:font script="Tibt" typeface="Microsoft Himalaya"/>
+        <a:font script="Thaa" typeface="MV Boli"/>
+        <a:font script="Deva" typeface="Mangal"/>
+        <a:font script="Telu" typeface="Gautami"/>
+        <a:font script="Taml" typeface="Latha"/>
+        <a:font script="Syrc" typeface="Estrangelo Edessa"/>
+        <a:font script="Orya" typeface="Kalinga"/>
+        <a:font script="Mlym" typeface="Kartika"/>
+        <a:font script="Laoo" typeface="DokChampa"/>
+        <a:font script="Sinh" typeface="Iskoola Pota"/>
+        <a:font script="Mong" typeface="Mongolian Baiti"/>
+        <a:font script="Viet" typeface="Arial"/>
+        <a:font script="Uigh" typeface="Microsoft Uighur"/>
+        <a:font script="Geor" typeface="Sylfaen"/>
+        <a:font script="Armn" typeface="Arial"/>
+        <a:font script="Bugi" typeface="Leelawadee UI"/>
+        <a:font script="Bopo" typeface="Microsoft JhengHei"/>
+        <a:font script="Java" typeface="Javanese Text"/>
+        <a:font script="Lisu" typeface="Segoe UI"/>
+        <a:font script="Mymr" typeface="Myanmar Text"/>
+        <a:font script="Nkoo" typeface="Ebrima"/>
+        <a:font script="Olck" typeface="Nirmala UI"/>
+        <a:font script="Osma" typeface="Ebrima"/>
+        <a:font script="Phag" typeface="Phagspa"/>
+        <a:font script="Syrn" typeface="Estrangelo Edessa"/>
+        <a:font script="Syrj" typeface="Estrangelo Edessa"/>
+        <a:font script="Syre" typeface="Estrangelo Edessa"/>
+        <a:font script="Sora" typeface="Nirmala UI"/>
+        <a:font script="Tale" typeface="Microsoft Tai Le"/>
+        <a:font script="Talu" typeface="Microsoft New Tai Lue"/>
+        <a:font script="Tfng" typeface="Ebrima"/>
+      </a:minorFont>
+    </a:fontScheme>
+    <a:fmtScheme name="Office">
+      <a:fillStyleLst>
+        <a:solidFill>
+          <a:schemeClr val="phClr"/>
+        </a:solidFill>
+        <a:gradFill rotWithShape="1">
+          <a:gsLst>
+            <a:gs pos="0">
+              <a:schemeClr val="phClr">
+                <a:lumMod val="110000"/>
+                <a:satMod val="105000"/>
+                <a:tint val="67000"/>
+              </a:schemeClr>
+            </a:gs>
+            <a:gs pos="50000">
+              <a:schemeClr val="phClr">
+                <a:lumMod val="105000"/>
+                <a:satMod val="103000"/>
+                <a:tint val="73000"/>
+              </a:schemeClr>
+            </a:gs>
+            <a:gs pos="100000">
+              <a:schemeClr val="phClr">
+                <a:lumMod val="105000"/>
+                <a:satMod val="109000"/>
+                <a:tint val="81000"/>
+              </a:schemeClr>
+            </a:gs>
+          </a:gsLst>
+          <a:lin ang="5400000" scaled="0"/>
+        </a:gradFill>
+        <a:gradFill rotWithShape="1">
+          <a:gsLst>
+            <a:gs pos="0">
+              <a:schemeClr val="phClr">
+                <a:satMod val="103000"/>
+                <a:lumMod val="102000"/>
+                <a:tint val="94000"/>
+              </a:schemeClr>
+            </a:gs>
+            <a:gs pos="50000">
+              <a:schemeClr val="phClr">
+                <a:satMod val="110000"/>
+                <a:lumMod val="100000"/>
+                <a:shade val="100000"/>
+              </a:schemeClr>
+            </a:gs>
+            <a:gs pos="100000">
+              <a:schemeClr val="phClr">
+                <a:lumMod val="99000"/>
+                <a:satMod val="120000"/>
+                <a:shade val="78000"/>
+              </a:schemeClr>
+            </a:gs>
+          </a:gsLst>
+          <a:lin ang="5400000" scaled="0"/>
+        </a:gradFill>
+      </a:fillStyleLst>
+      <a:lnStyleLst>
+        <a:ln w="12700" cap="flat" cmpd="sng" algn="ctr">
+          <a:solidFill>
+            <a:schemeClr val="phClr"/>
+          </a:solidFill>
+          <a:prstDash val="solid"/>
+          <a:miter lim="800000"/>
+        </a:ln>
+        <a:ln w="19050" cap="flat" cmpd="sng" algn="ctr">
+          <a:solidFill>
+            <a:schemeClr val="phClr"/>
+          </a:solidFill>
+          <a:prstDash val="solid"/>
+          <a:miter lim="800000"/>
+        </a:ln>
+        <a:ln w="25400" cap="flat" cmpd="sng" algn="ctr">
+          <a:solidFill>
+            <a:schemeClr val="phClr"/>
+          </a:solidFill>
+          <a:prstDash val="solid"/>
+          <a:miter lim="800000"/>
+        </a:ln>
+      </a:lnStyleLst>
+      <a:effectStyleLst>
+        <a:effectStyle>
+          <a:effectLst/>
+        </a:effectStyle>
+        <a:effectStyle>
+          <a:effectLst/>
+        </a:effectStyle>
+        <a:effectStyle>
+          <a:effectLst>
+            <a:outerShdw blurRad="57150" dist="19050" dir="5400000" algn="ctr" rotWithShape="0">
+              <a:srgbClr val="000000">
+                <a:alpha val="63000"/>
+              </a:srgbClr>
+            </a:outerShdw>
+          </a:effectLst>
+        </a:effectStyle>
+      </a:effectStyleLst>
+      <a:bgFillStyleLst>
+        <a:solidFill>
+          <a:schemeClr val="phClr"/>
+        </a:solidFill>
+        <a:solidFill>
+          <a:schemeClr val="phClr">
+            <a:tint val="95000"/>
+            <a:satMod val="170000"/>
+          </a:schemeClr>
+        </a:solidFill>
+        <a:gradFill rotWithShape="1">
+          <a:gsLst>
+            <a:gs pos="0">
+              <a:schemeClr val="phClr">
+                <a:tint val="93000"/>
+                <a:satMod val="150000"/>
+                <a:shade val="98000"/>
+                <a:lumMod val="102000"/>
+              </a:schemeClr>
+            </a:gs>
+            <a:gs pos="50000">
+              <a:schemeClr val="phClr">
+                <a:tint val="98000"/>
+                <a:satMod val="130000"/>
+                <a:shade val="90000"/>
+                <a:lumMod val="103000"/>
+              </a:schemeClr>
+            </a:gs>
+            <a:gs pos="100000">
+              <a:schemeClr val="phClr">
+                <a:shade val="63000"/>
+                <a:satMod val="120000"/>
+              </a:schemeClr>
+            </a:gs>
+          </a:gsLst>
+          <a:lin ang="5400000" scaled="0"/>
+        </a:gradFill>
+      </a:bgFillStyleLst>
+    </a:fmtScheme>
+  </a:themeElements>
+  <a:objectDefaults>
+    <a:lnDef>
+      <a:spPr/>
+      <a:bodyPr/>
+      <a:lstStyle/>
+      <a:style>
+        <a:lnRef idx="2">
+          <a:schemeClr val="accent1"/>
+        </a:lnRef>
+        <a:fillRef idx="0">
+          <a:schemeClr val="accent1"/>
+        </a:fillRef>
+        <a:effectRef idx="1">
+          <a:schemeClr val="accent1"/>
+        </a:effectRef>
+        <a:fontRef idx="minor">
+          <a:schemeClr val="tx1"/>
+        </a:fontRef>
+      </a:style>
+    </a:lnDef>
+  </a:objectDefaults>
+  <a:extraClrSchemeLst/>
+  <a:extLst>
+    <a:ext uri="{05A4C25C-085E-4340-85A3-A5531E510DB2}">
+      <thm15:themeFamily xmlns:thm15="http://schemas.microsoft.com/office/thememl/2012/main" name="Office Theme" id="{2E142A2C-CD16-42D6-873A-C26D2A0506FA}" vid="{1BDDFF52-6CD6-40A5-AB3C-68EB2F1E4D0A}"/>
+    </a:ext>
+  </a:extLst>
+</a:theme>
 </file>